--- a/발표자료/4팀_findeR_발표ppt_v0.02.pptx
+++ b/발표자료/4팀_findeR_발표ppt_v0.02.pptx
@@ -847,7 +847,7 @@
               <a:defRPr/>
             </a:pPr>
             <a:r>
-              <a:rPr lang="ko-KR" altLang="ko-KR" sz="2400" b="1" dirty="0" err="1" smtClean="0">
+              <a:rPr lang="ko-KR" altLang="ko-KR" sz="2400" b="1" dirty="0" err="1">
                 <a:solidFill>
                   <a:schemeClr val="bg1"/>
                 </a:solidFill>
@@ -857,7 +857,7 @@
               <a:t>유기견</a:t>
             </a:r>
             <a:r>
-              <a:rPr lang="ko-KR" altLang="ko-KR" sz="2400" b="1" dirty="0" smtClean="0">
+              <a:rPr lang="ko-KR" altLang="ko-KR" sz="2400" b="1" dirty="0">
                 <a:solidFill>
                   <a:schemeClr val="bg1"/>
                 </a:solidFill>
@@ -867,7 +867,7 @@
               <a:t> 성향 분석 기반 추천 플랫폼 구축 및</a:t>
             </a:r>
             <a:r>
-              <a:rPr lang="en-US" altLang="ko-KR" sz="2400" b="1" baseline="0" dirty="0" smtClean="0">
+              <a:rPr lang="en-US" altLang="ko-KR" sz="2400" b="1" baseline="0" dirty="0">
                 <a:solidFill>
                   <a:schemeClr val="bg1"/>
                 </a:solidFill>
@@ -877,7 +877,7 @@
               <a:t> </a:t>
             </a:r>
             <a:r>
-              <a:rPr lang="ko-KR" altLang="ko-KR" sz="2400" b="1" dirty="0" smtClean="0">
+              <a:rPr lang="ko-KR" altLang="ko-KR" sz="2400" b="1" dirty="0">
                 <a:solidFill>
                   <a:schemeClr val="bg1"/>
                 </a:solidFill>
@@ -886,18 +886,8 @@
               </a:rPr>
               <a:t>정보보호 체계 강화 사업</a:t>
             </a:r>
-            <a:r>
-              <a:rPr lang="en-US" altLang="ko-KR" sz="2400" b="1" dirty="0" smtClean="0">
-                <a:solidFill>
-                  <a:schemeClr val="bg1"/>
-                </a:solidFill>
-                <a:latin typeface="Arial Black" panose="020B0A04020102020204" pitchFamily="34" charset="0"/>
-                <a:ea typeface="Noto Sans KR Black" panose="020B0200000000000000" pitchFamily="50" charset="-127"/>
-              </a:rPr>
-              <a:t/>
-            </a:r>
             <a:br>
-              <a:rPr lang="en-US" altLang="ko-KR" sz="2400" b="1" dirty="0" smtClean="0">
+              <a:rPr lang="en-US" altLang="ko-KR" sz="2400" b="1" dirty="0">
                 <a:solidFill>
                   <a:schemeClr val="bg1"/>
                 </a:solidFill>
@@ -2201,16 +2191,6 @@
               <a:defRPr/>
             </a:pPr>
             <a:r>
-              <a:rPr lang="en-US" altLang="ko-KR" sz="1600" dirty="0" smtClean="0">
-                <a:solidFill>
-                  <a:schemeClr val="bg1"/>
-                </a:solidFill>
-                <a:latin typeface="Arial Black" panose="020B0A04020102020204" pitchFamily="34" charset="0"/>
-                <a:ea typeface="Noto Sans KR Black" panose="020B0200000000000000" pitchFamily="50" charset="-127"/>
-              </a:rPr>
-              <a:t>Security </a:t>
-            </a:r>
-            <a:r>
               <a:rPr lang="en-US" altLang="ko-KR" sz="1600" dirty="0">
                 <a:solidFill>
                   <a:schemeClr val="bg1"/>
@@ -2218,20 +2198,10 @@
                 <a:latin typeface="Arial Black" panose="020B0A04020102020204" pitchFamily="34" charset="0"/>
                 <a:ea typeface="Noto Sans KR Black" panose="020B0200000000000000" pitchFamily="50" charset="-127"/>
               </a:rPr>
-              <a:t>Report</a:t>
-            </a:r>
-            <a:r>
-              <a:rPr lang="en-US" altLang="ko-KR" sz="1600" dirty="0" smtClean="0">
-                <a:solidFill>
-                  <a:schemeClr val="bg1"/>
-                </a:solidFill>
-                <a:latin typeface="Arial Black" panose="020B0A04020102020204" pitchFamily="34" charset="0"/>
-                <a:ea typeface="Noto Sans KR Black" panose="020B0200000000000000" pitchFamily="50" charset="-127"/>
-              </a:rPr>
-              <a:t>.</a:t>
+              <a:t>Security Report.</a:t>
             </a:r>
             <a:br>
-              <a:rPr lang="en-US" altLang="ko-KR" sz="1600" dirty="0" smtClean="0">
+              <a:rPr lang="en-US" altLang="ko-KR" sz="1600" dirty="0">
                 <a:solidFill>
                   <a:schemeClr val="bg1"/>
                 </a:solidFill>
@@ -2259,13 +2229,6 @@
   <p:clrMapOvr>
     <a:masterClrMapping/>
   </p:clrMapOvr>
-  <p:timing>
-    <p:tnLst>
-      <p:par>
-        <p:cTn id="1" dur="indefinite" restart="never" nodeType="tmRoot"/>
-      </p:par>
-    </p:tnLst>
-  </p:timing>
 </p:sldLayout>
 </file>
 
@@ -2990,7 +2953,7 @@
           <a:p>
             <a:pPr lvl="0"/>
             <a:r>
-              <a:rPr lang="ko-KR" altLang="en-US" dirty="0" err="1" smtClean="0"/>
+              <a:rPr lang="ko-KR" altLang="en-US" dirty="0" err="1"/>
               <a:t>제목입력</a:t>
             </a:r>
             <a:endParaRPr lang="ko-KR" altLang="en-US" dirty="0"/>
@@ -3091,10 +3054,9 @@
           <a:p>
             <a:pPr lvl="0"/>
             <a:r>
-              <a:rPr lang="ko-KR" altLang="en-US" dirty="0" smtClean="0"/>
+              <a:rPr lang="ko-KR" altLang="en-US" dirty="0"/>
               <a:t>이름</a:t>
             </a:r>
-            <a:endParaRPr lang="ko-KR" altLang="en-US" dirty="0"/>
           </a:p>
         </p:txBody>
       </p:sp>
@@ -3142,10 +3104,9 @@
           <a:p>
             <a:pPr lvl="0"/>
             <a:r>
-              <a:rPr lang="ko-KR" altLang="en-US" dirty="0" smtClean="0"/>
+              <a:rPr lang="ko-KR" altLang="en-US" dirty="0"/>
               <a:t>부제목</a:t>
             </a:r>
-            <a:endParaRPr lang="ko-KR" altLang="en-US" dirty="0"/>
           </a:p>
         </p:txBody>
       </p:sp>
@@ -3201,34 +3162,34 @@
           <a:p>
             <a:pPr lvl="0"/>
             <a:r>
-              <a:rPr lang="ko-KR" altLang="en-US" dirty="0" smtClean="0"/>
+              <a:rPr lang="ko-KR" altLang="en-US" dirty="0"/>
               <a:t>내용</a:t>
             </a:r>
-            <a:endParaRPr lang="en-US" altLang="ko-KR" dirty="0" smtClean="0"/>
+            <a:endParaRPr lang="en-US" altLang="ko-KR" dirty="0"/>
           </a:p>
           <a:p>
             <a:pPr lvl="0"/>
-            <a:endParaRPr lang="en-US" altLang="ko-KR" dirty="0" smtClean="0"/>
+            <a:endParaRPr lang="en-US" altLang="ko-KR" dirty="0"/>
           </a:p>
           <a:p>
             <a:pPr lvl="0"/>
-            <a:endParaRPr lang="en-US" altLang="ko-KR" dirty="0" smtClean="0"/>
+            <a:endParaRPr lang="en-US" altLang="ko-KR" dirty="0"/>
           </a:p>
           <a:p>
             <a:pPr lvl="0"/>
-            <a:endParaRPr lang="en-US" altLang="ko-KR" dirty="0" smtClean="0"/>
+            <a:endParaRPr lang="en-US" altLang="ko-KR" dirty="0"/>
           </a:p>
           <a:p>
             <a:pPr lvl="0"/>
-            <a:endParaRPr lang="en-US" altLang="ko-KR" dirty="0" smtClean="0"/>
+            <a:endParaRPr lang="en-US" altLang="ko-KR" dirty="0"/>
           </a:p>
           <a:p>
             <a:pPr lvl="0"/>
-            <a:endParaRPr lang="en-US" altLang="ko-KR" dirty="0" smtClean="0"/>
+            <a:endParaRPr lang="en-US" altLang="ko-KR" dirty="0"/>
           </a:p>
           <a:p>
             <a:pPr lvl="0"/>
-            <a:endParaRPr lang="ko-KR" altLang="en-US" dirty="0" smtClean="0"/>
+            <a:endParaRPr lang="ko-KR" altLang="en-US" dirty="0"/>
           </a:p>
         </p:txBody>
       </p:sp>
@@ -3242,13 +3203,6 @@
   <p:clrMapOvr>
     <a:masterClrMapping/>
   </p:clrMapOvr>
-  <p:timing>
-    <p:tnLst>
-      <p:par>
-        <p:cTn id="1" dur="indefinite" restart="never" nodeType="tmRoot"/>
-      </p:par>
-    </p:tnLst>
-  </p:timing>
 </p:sldLayout>
 </file>
 
@@ -3972,7 +3926,7 @@
           <a:p>
             <a:pPr lvl="0"/>
             <a:r>
-              <a:rPr lang="ko-KR" altLang="en-US" dirty="0" err="1" smtClean="0"/>
+              <a:rPr lang="ko-KR" altLang="en-US" dirty="0" err="1"/>
               <a:t>제목입력</a:t>
             </a:r>
             <a:endParaRPr lang="ko-KR" altLang="en-US" dirty="0"/>
@@ -4073,10 +4027,9 @@
           <a:p>
             <a:pPr lvl="0"/>
             <a:r>
-              <a:rPr lang="ko-KR" altLang="en-US" dirty="0" smtClean="0"/>
+              <a:rPr lang="ko-KR" altLang="en-US" dirty="0"/>
               <a:t>이름</a:t>
             </a:r>
-            <a:endParaRPr lang="ko-KR" altLang="en-US" dirty="0"/>
           </a:p>
         </p:txBody>
       </p:sp>
@@ -4330,10 +4283,9 @@
           <a:p>
             <a:pPr lvl="0"/>
             <a:r>
-              <a:rPr lang="ko-KR" altLang="en-US" dirty="0" smtClean="0"/>
+              <a:rPr lang="ko-KR" altLang="en-US" dirty="0"/>
               <a:t>이름</a:t>
             </a:r>
-            <a:endParaRPr lang="ko-KR" altLang="en-US" dirty="0"/>
           </a:p>
         </p:txBody>
       </p:sp>
@@ -4379,10 +4331,9 @@
           <a:p>
             <a:pPr lvl="0"/>
             <a:r>
-              <a:rPr lang="ko-KR" altLang="en-US" dirty="0" smtClean="0"/>
+              <a:rPr lang="ko-KR" altLang="en-US" dirty="0"/>
               <a:t>이름</a:t>
             </a:r>
-            <a:endParaRPr lang="ko-KR" altLang="en-US" dirty="0"/>
           </a:p>
         </p:txBody>
       </p:sp>
@@ -4428,10 +4379,9 @@
           <a:p>
             <a:pPr lvl="0"/>
             <a:r>
-              <a:rPr lang="ko-KR" altLang="en-US" dirty="0" smtClean="0"/>
+              <a:rPr lang="ko-KR" altLang="en-US" dirty="0"/>
               <a:t>이름</a:t>
             </a:r>
-            <a:endParaRPr lang="ko-KR" altLang="en-US" dirty="0"/>
           </a:p>
         </p:txBody>
       </p:sp>
@@ -4477,10 +4427,9 @@
           <a:p>
             <a:pPr lvl="0"/>
             <a:r>
-              <a:rPr lang="ko-KR" altLang="en-US" dirty="0" smtClean="0"/>
+              <a:rPr lang="ko-KR" altLang="en-US" dirty="0"/>
               <a:t>이름</a:t>
             </a:r>
-            <a:endParaRPr lang="ko-KR" altLang="en-US" dirty="0"/>
           </a:p>
         </p:txBody>
       </p:sp>
@@ -4526,10 +4475,9 @@
           <a:p>
             <a:pPr lvl="0"/>
             <a:r>
-              <a:rPr lang="ko-KR" altLang="en-US" dirty="0" smtClean="0"/>
+              <a:rPr lang="ko-KR" altLang="en-US" dirty="0"/>
               <a:t>내용</a:t>
             </a:r>
-            <a:endParaRPr lang="ko-KR" altLang="en-US" dirty="0"/>
           </a:p>
         </p:txBody>
       </p:sp>
@@ -4575,10 +4523,9 @@
           <a:p>
             <a:pPr lvl="0"/>
             <a:r>
-              <a:rPr lang="ko-KR" altLang="en-US" dirty="0" smtClean="0"/>
+              <a:rPr lang="ko-KR" altLang="en-US" dirty="0"/>
               <a:t>내용</a:t>
             </a:r>
-            <a:endParaRPr lang="ko-KR" altLang="en-US" dirty="0"/>
           </a:p>
         </p:txBody>
       </p:sp>
@@ -4624,10 +4571,9 @@
           <a:p>
             <a:pPr lvl="0"/>
             <a:r>
-              <a:rPr lang="ko-KR" altLang="en-US" dirty="0" smtClean="0"/>
+              <a:rPr lang="ko-KR" altLang="en-US" dirty="0"/>
               <a:t>내용</a:t>
             </a:r>
-            <a:endParaRPr lang="ko-KR" altLang="en-US" dirty="0"/>
           </a:p>
         </p:txBody>
       </p:sp>
@@ -4673,10 +4619,9 @@
           <a:p>
             <a:pPr lvl="0"/>
             <a:r>
-              <a:rPr lang="ko-KR" altLang="en-US" dirty="0" smtClean="0"/>
+              <a:rPr lang="ko-KR" altLang="en-US" dirty="0"/>
               <a:t>내용</a:t>
             </a:r>
-            <a:endParaRPr lang="ko-KR" altLang="en-US" dirty="0"/>
           </a:p>
         </p:txBody>
       </p:sp>
@@ -4722,10 +4667,9 @@
           <a:p>
             <a:pPr lvl="0"/>
             <a:r>
-              <a:rPr lang="ko-KR" altLang="en-US" dirty="0" smtClean="0"/>
+              <a:rPr lang="ko-KR" altLang="en-US" dirty="0"/>
               <a:t>내용</a:t>
             </a:r>
-            <a:endParaRPr lang="ko-KR" altLang="en-US" dirty="0"/>
           </a:p>
         </p:txBody>
       </p:sp>
@@ -4739,13 +4683,6 @@
   <p:clrMapOvr>
     <a:masterClrMapping/>
   </p:clrMapOvr>
-  <p:timing>
-    <p:tnLst>
-      <p:par>
-        <p:cTn id="1" dur="indefinite" restart="never" nodeType="tmRoot"/>
-      </p:par>
-    </p:tnLst>
-  </p:timing>
 </p:sldLayout>
 </file>
 
@@ -5518,7 +5455,7 @@
               <a:defRPr/>
             </a:pPr>
             <a:r>
-              <a:rPr kumimoji="0" lang="en-US" altLang="ko-KR" sz="2800" b="1" i="0" u="none" strike="noStrike" kern="1200" cap="none" spc="0" normalizeH="0" baseline="0" noProof="0" dirty="0" smtClean="0">
+              <a:rPr kumimoji="0" lang="en-US" altLang="ko-KR" sz="2800" b="1" i="0" u="none" strike="noStrike" kern="1200" cap="none" spc="0" normalizeH="0" baseline="0" noProof="0" dirty="0">
                 <a:ln>
                   <a:noFill/>
                 </a:ln>
@@ -5614,7 +5551,7 @@
               <a:defRPr/>
             </a:pPr>
             <a:r>
-              <a:rPr kumimoji="0" lang="en-US" altLang="ko-KR" sz="2400" b="0" i="0" u="none" strike="noStrike" kern="1200" cap="none" spc="0" normalizeH="0" baseline="0" noProof="0" dirty="0" smtClean="0">
+              <a:rPr kumimoji="0" lang="en-US" altLang="ko-KR" sz="2400" b="0" i="0" u="none" strike="noStrike" kern="1200" cap="none" spc="0" normalizeH="0" baseline="0" noProof="0" dirty="0">
                 <a:ln>
                   <a:noFill/>
                 </a:ln>
@@ -5629,19 +5566,6 @@
               </a:rPr>
               <a:t>Q &amp; A</a:t>
             </a:r>
-            <a:endParaRPr kumimoji="0" lang="en-US" altLang="ko-KR" sz="2400" b="0" i="0" u="none" strike="noStrike" kern="1200" cap="none" spc="0" normalizeH="0" baseline="0" noProof="0" dirty="0">
-              <a:ln>
-                <a:noFill/>
-              </a:ln>
-              <a:solidFill>
-                <a:prstClr val="white"/>
-              </a:solidFill>
-              <a:effectLst/>
-              <a:uLnTx/>
-              <a:uFillTx/>
-              <a:latin typeface="Arial Black" panose="020B0A04020102020204" pitchFamily="34" charset="0"/>
-              <a:ea typeface="Noto Sans KR Medium" panose="020B0200000000000000"/>
-            </a:endParaRPr>
           </a:p>
         </p:txBody>
       </p:sp>
@@ -5909,14 +5833,7 @@
   <p:clrMapOvr>
     <a:masterClrMapping/>
   </p:clrMapOvr>
-  <p:timing>
-    <p:tnLst>
-      <p:par>
-        <p:cTn id="1" dur="indefinite" restart="never" nodeType="tmRoot"/>
-      </p:par>
-    </p:tnLst>
-  </p:timing>
-  <p:extLst mod="1">
+  <p:extLst>
     <p:ext uri="{DCECCB84-F9BA-43D5-87BE-67443E8EF086}">
       <p15:sldGuideLst xmlns:p15="http://schemas.microsoft.com/office/powerpoint/2012/main">
         <p15:guide id="1" orient="horz" pos="2160">
@@ -6739,7 +6656,7 @@
           <a:p>
             <a:pPr lvl="0"/>
             <a:r>
-              <a:rPr lang="ko-KR" altLang="en-US" dirty="0" err="1" smtClean="0"/>
+              <a:rPr lang="ko-KR" altLang="en-US" dirty="0" err="1"/>
               <a:t>제목입력</a:t>
             </a:r>
             <a:endParaRPr lang="ko-KR" altLang="en-US" dirty="0"/>
@@ -6756,13 +6673,6 @@
   <p:clrMapOvr>
     <a:masterClrMapping/>
   </p:clrMapOvr>
-  <p:timing>
-    <p:tnLst>
-      <p:par>
-        <p:cTn id="1" dur="indefinite" restart="never" nodeType="tmRoot"/>
-      </p:par>
-    </p:tnLst>
-  </p:timing>
 </p:sldLayout>
 </file>
 
@@ -7085,7 +6995,7 @@
           <a:p>
             <a:pPr algn="ctr"/>
             <a:r>
-              <a:rPr lang="ko-KR" altLang="en-US" sz="3600" dirty="0" smtClean="0">
+              <a:rPr lang="ko-KR" altLang="en-US" sz="3600" dirty="0">
                 <a:solidFill>
                   <a:schemeClr val="bg1"/>
                 </a:solidFill>
@@ -7095,7 +7005,7 @@
               <a:t>감사합니다</a:t>
             </a:r>
             <a:r>
-              <a:rPr lang="en-US" altLang="ko-KR" sz="3600" dirty="0" smtClean="0">
+              <a:rPr lang="en-US" altLang="ko-KR" sz="3600" dirty="0">
                 <a:solidFill>
                   <a:schemeClr val="bg1"/>
                 </a:solidFill>
@@ -8364,13 +8274,6 @@
   <p:clrMapOvr>
     <a:masterClrMapping/>
   </p:clrMapOvr>
-  <p:timing>
-    <p:tnLst>
-      <p:par>
-        <p:cTn id="1" dur="indefinite" restart="never" nodeType="tmRoot"/>
-      </p:par>
-    </p:tnLst>
-  </p:timing>
 </p:sldLayout>
 </file>
 
@@ -11504,13 +11407,6 @@
   <p:clrMapOvr>
     <a:masterClrMapping/>
   </p:clrMapOvr>
-  <p:timing>
-    <p:tnLst>
-      <p:par>
-        <p:cTn id="1" dur="indefinite" restart="never" nodeType="tmRoot"/>
-      </p:par>
-    </p:tnLst>
-  </p:timing>
 </p:sldLayout>
 </file>
 
@@ -12537,7 +12433,7 @@
               <a:defRPr/>
             </a:pPr>
             <a:r>
-              <a:rPr kumimoji="0" lang="en-US" altLang="ko-KR" sz="2800" b="1" i="0" u="none" strike="noStrike" kern="1200" cap="none" spc="0" normalizeH="0" baseline="0" noProof="0" dirty="0" smtClean="0">
+              <a:rPr kumimoji="0" lang="en-US" altLang="ko-KR" sz="2800" b="1" i="0" u="none" strike="noStrike" kern="1200" cap="none" spc="0" normalizeH="0" baseline="0" noProof="0" dirty="0">
                 <a:ln>
                   <a:noFill/>
                 </a:ln>
@@ -12632,7 +12528,7 @@
               <a:defRPr/>
             </a:pPr>
             <a:r>
-              <a:rPr kumimoji="0" lang="ko-KR" altLang="en-US" sz="2400" b="0" i="0" u="none" strike="noStrike" kern="1200" cap="none" spc="0" normalizeH="0" baseline="0" noProof="0" dirty="0" smtClean="0">
+              <a:rPr kumimoji="0" lang="ko-KR" altLang="en-US" sz="2400" b="0" i="0" u="none" strike="noStrike" kern="1200" cap="none" spc="0" normalizeH="0" baseline="0" noProof="0" dirty="0">
                 <a:ln>
                   <a:noFill/>
                 </a:ln>
@@ -12673,14 +12569,7 @@
   <p:clrMapOvr>
     <a:masterClrMapping/>
   </p:clrMapOvr>
-  <p:timing>
-    <p:tnLst>
-      <p:par>
-        <p:cTn id="1" dur="indefinite" restart="never" nodeType="tmRoot"/>
-      </p:par>
-    </p:tnLst>
-  </p:timing>
-  <p:extLst mod="1">
+  <p:extLst>
     <p:ext uri="{DCECCB84-F9BA-43D5-87BE-67443E8EF086}">
       <p15:sldGuideLst xmlns:p15="http://schemas.microsoft.com/office/powerpoint/2012/main">
         <p15:guide id="1" orient="horz" pos="2160" userDrawn="1">
@@ -13503,7 +13392,7 @@
           <a:p>
             <a:pPr lvl="0"/>
             <a:r>
-              <a:rPr lang="ko-KR" altLang="en-US" dirty="0" err="1" smtClean="0"/>
+              <a:rPr lang="ko-KR" altLang="en-US" dirty="0" err="1"/>
               <a:t>제목입력</a:t>
             </a:r>
             <a:endParaRPr lang="ko-KR" altLang="en-US" dirty="0"/>
@@ -13520,13 +13409,6 @@
   <p:clrMapOvr>
     <a:masterClrMapping/>
   </p:clrMapOvr>
-  <p:timing>
-    <p:tnLst>
-      <p:par>
-        <p:cTn id="1" dur="indefinite" restart="never" nodeType="tmRoot"/>
-      </p:par>
-    </p:tnLst>
-  </p:timing>
 </p:sldLayout>
 </file>
 
@@ -14299,7 +14181,7 @@
               <a:defRPr/>
             </a:pPr>
             <a:r>
-              <a:rPr kumimoji="0" lang="en-US" altLang="ko-KR" sz="2800" b="1" i="0" u="none" strike="noStrike" kern="1200" cap="none" spc="0" normalizeH="0" baseline="0" noProof="0" dirty="0" smtClean="0">
+              <a:rPr kumimoji="0" lang="en-US" altLang="ko-KR" sz="2800" b="1" i="0" u="none" strike="noStrike" kern="1200" cap="none" spc="0" normalizeH="0" baseline="0" noProof="0" dirty="0">
                 <a:ln>
                   <a:noFill/>
                 </a:ln>
@@ -14395,7 +14277,7 @@
               <a:defRPr/>
             </a:pPr>
             <a:r>
-              <a:rPr kumimoji="0" lang="ko-KR" altLang="en-US" sz="2400" b="0" i="0" u="none" strike="noStrike" kern="1200" cap="none" spc="0" normalizeH="0" baseline="0" noProof="0" dirty="0" smtClean="0">
+              <a:rPr kumimoji="0" lang="ko-KR" altLang="en-US" sz="2400" b="0" i="0" u="none" strike="noStrike" kern="1200" cap="none" spc="0" normalizeH="0" baseline="0" noProof="0" dirty="0">
                 <a:ln>
                   <a:noFill/>
                 </a:ln>
@@ -14690,14 +14572,7 @@
   <p:clrMapOvr>
     <a:masterClrMapping/>
   </p:clrMapOvr>
-  <p:timing>
-    <p:tnLst>
-      <p:par>
-        <p:cTn id="1" dur="indefinite" restart="never" nodeType="tmRoot"/>
-      </p:par>
-    </p:tnLst>
-  </p:timing>
-  <p:extLst mod="1">
+  <p:extLst>
     <p:ext uri="{DCECCB84-F9BA-43D5-87BE-67443E8EF086}">
       <p15:sldGuideLst xmlns:p15="http://schemas.microsoft.com/office/powerpoint/2012/main">
         <p15:guide id="1" orient="horz" pos="2160">
@@ -15520,7 +15395,7 @@
           <a:p>
             <a:pPr lvl="0"/>
             <a:r>
-              <a:rPr lang="ko-KR" altLang="en-US" dirty="0" err="1" smtClean="0"/>
+              <a:rPr lang="ko-KR" altLang="en-US" dirty="0" err="1"/>
               <a:t>제목입력</a:t>
             </a:r>
             <a:endParaRPr lang="ko-KR" altLang="en-US" dirty="0"/>
@@ -15537,13 +15412,6 @@
   <p:clrMapOvr>
     <a:masterClrMapping/>
   </p:clrMapOvr>
-  <p:timing>
-    <p:tnLst>
-      <p:par>
-        <p:cTn id="1" dur="indefinite" restart="never" nodeType="tmRoot"/>
-      </p:par>
-    </p:tnLst>
-  </p:timing>
 </p:sldLayout>
 </file>
 
@@ -16316,7 +16184,7 @@
               <a:defRPr/>
             </a:pPr>
             <a:r>
-              <a:rPr kumimoji="0" lang="en-US" altLang="ko-KR" sz="2800" b="1" i="0" u="none" strike="noStrike" kern="1200" cap="none" spc="0" normalizeH="0" baseline="0" noProof="0" dirty="0" smtClean="0">
+              <a:rPr kumimoji="0" lang="en-US" altLang="ko-KR" sz="2800" b="1" i="0" u="none" strike="noStrike" kern="1200" cap="none" spc="0" normalizeH="0" baseline="0" noProof="0" dirty="0">
                 <a:ln>
                   <a:noFill/>
                 </a:ln>
@@ -16412,7 +16280,7 @@
               <a:defRPr/>
             </a:pPr>
             <a:r>
-              <a:rPr kumimoji="0" lang="ko-KR" altLang="en-US" sz="2400" b="0" i="0" u="none" strike="noStrike" kern="1200" cap="none" spc="0" normalizeH="0" baseline="0" noProof="0" dirty="0" smtClean="0">
+              <a:rPr kumimoji="0" lang="ko-KR" altLang="en-US" sz="2400" b="0" i="0" u="none" strike="noStrike" kern="1200" cap="none" spc="0" normalizeH="0" baseline="0" noProof="0" dirty="0">
                 <a:ln>
                   <a:noFill/>
                 </a:ln>
@@ -16707,14 +16575,7 @@
   <p:clrMapOvr>
     <a:masterClrMapping/>
   </p:clrMapOvr>
-  <p:timing>
-    <p:tnLst>
-      <p:par>
-        <p:cTn id="1" dur="indefinite" restart="never" nodeType="tmRoot"/>
-      </p:par>
-    </p:tnLst>
-  </p:timing>
-  <p:extLst mod="1">
+  <p:extLst>
     <p:ext uri="{DCECCB84-F9BA-43D5-87BE-67443E8EF086}">
       <p15:sldGuideLst xmlns:p15="http://schemas.microsoft.com/office/powerpoint/2012/main">
         <p15:guide id="1" orient="horz" pos="2160">
@@ -17537,7 +17398,7 @@
           <a:p>
             <a:pPr lvl="0"/>
             <a:r>
-              <a:rPr lang="ko-KR" altLang="en-US" dirty="0" err="1" smtClean="0"/>
+              <a:rPr lang="ko-KR" altLang="en-US" dirty="0" err="1"/>
               <a:t>제목입력</a:t>
             </a:r>
             <a:endParaRPr lang="ko-KR" altLang="en-US" dirty="0"/>
@@ -17554,13 +17415,6 @@
   <p:clrMapOvr>
     <a:masterClrMapping/>
   </p:clrMapOvr>
-  <p:timing>
-    <p:tnLst>
-      <p:par>
-        <p:cTn id="1" dur="indefinite" restart="never" nodeType="tmRoot"/>
-      </p:par>
-    </p:tnLst>
-  </p:timing>
 </p:sldLayout>
 </file>
 
@@ -18344,7 +18198,7 @@
           <a:p>
             <a:pPr lvl="0"/>
             <a:r>
-              <a:rPr lang="ko-KR" altLang="en-US" dirty="0" err="1" smtClean="0"/>
+              <a:rPr lang="ko-KR" altLang="en-US" dirty="0" err="1"/>
               <a:t>제목입력</a:t>
             </a:r>
             <a:endParaRPr lang="ko-KR" altLang="en-US" dirty="0"/>
@@ -18445,10 +18299,9 @@
           <a:p>
             <a:pPr lvl="0"/>
             <a:r>
-              <a:rPr lang="ko-KR" altLang="en-US" dirty="0" smtClean="0"/>
+              <a:rPr lang="ko-KR" altLang="en-US" dirty="0"/>
               <a:t>이름</a:t>
             </a:r>
-            <a:endParaRPr lang="ko-KR" altLang="en-US" dirty="0"/>
           </a:p>
         </p:txBody>
       </p:sp>
@@ -18525,10 +18378,9 @@
           <a:p>
             <a:pPr lvl="0"/>
             <a:r>
-              <a:rPr lang="ko-KR" altLang="en-US" dirty="0" smtClean="0"/>
+              <a:rPr lang="ko-KR" altLang="en-US" dirty="0"/>
               <a:t>내용</a:t>
             </a:r>
-            <a:endParaRPr lang="ko-KR" altLang="en-US" dirty="0"/>
           </a:p>
         </p:txBody>
       </p:sp>
@@ -18542,13 +18394,6 @@
   <p:clrMapOvr>
     <a:masterClrMapping/>
   </p:clrMapOvr>
-  <p:timing>
-    <p:tnLst>
-      <p:par>
-        <p:cTn id="1" dur="indefinite" restart="never" nodeType="tmRoot"/>
-      </p:par>
-    </p:tnLst>
-  </p:timing>
 </p:sldLayout>
 </file>
 
@@ -18872,13 +18717,6 @@
     <p:sldLayoutId id="2147483685" r:id="rId13"/>
     <p:sldLayoutId id="2147483688" r:id="rId14"/>
   </p:sldLayoutIdLst>
-  <p:timing>
-    <p:tnLst>
-      <p:par>
-        <p:cTn id="1" dur="indefinite" restart="never" nodeType="tmRoot"/>
-      </p:par>
-    </p:tnLst>
-  </p:timing>
   <p:txStyles>
     <p:titleStyle>
       <a:lvl1pPr algn="l" defTabSz="914400" rtl="0" eaLnBrk="1" latinLnBrk="1" hangingPunct="1">
@@ -19189,13 +19027,6 @@
   <p:clrMapOvr>
     <a:masterClrMapping/>
   </p:clrMapOvr>
-  <p:timing>
-    <p:tnLst>
-      <p:par>
-        <p:cTn id="1" dur="indefinite" restart="never" nodeType="tmRoot"/>
-      </p:par>
-    </p:tnLst>
-  </p:timing>
 </p:sld>
 </file>
 
@@ -19232,10 +19063,9 @@
           <a:lstStyle/>
           <a:p>
             <a:r>
-              <a:rPr lang="ko-KR" altLang="en-US" dirty="0" smtClean="0"/>
+              <a:rPr lang="ko-KR" altLang="en-US" dirty="0"/>
               <a:t>사용 툴</a:t>
             </a:r>
-            <a:endParaRPr lang="ko-KR" altLang="en-US" dirty="0"/>
           </a:p>
         </p:txBody>
       </p:sp>
@@ -19488,18 +19318,6 @@
                 </a:rPr>
                 <a:t>Tracer</a:t>
               </a:r>
-              <a:r>
-                <a:rPr lang="ko-KR" sz="1050" b="1" dirty="0">
-                  <a:solidFill>
-                    <a:schemeClr val="lt1"/>
-                  </a:solidFill>
-                  <a:latin typeface="Noto Sans KR"/>
-                  <a:ea typeface="Noto Sans KR"/>
-                  <a:cs typeface="Noto Sans KR"/>
-                  <a:sym typeface="Noto Sans KR"/>
-                </a:rPr>
-                <a:t/>
-              </a:r>
               <a:br>
                 <a:rPr lang="ko-KR" sz="1050" b="1" dirty="0">
                   <a:solidFill>
@@ -19512,7 +19330,7 @@
                 </a:rPr>
               </a:br>
               <a:r>
-                <a:rPr lang="en-US" altLang="ko-KR" sz="1050" b="1" dirty="0" smtClean="0">
+                <a:rPr lang="en-US" altLang="ko-KR" sz="1050" b="1" dirty="0">
                   <a:solidFill>
                     <a:schemeClr val="dk1"/>
                   </a:solidFill>
@@ -19584,18 +19402,6 @@
                 </a:rPr>
                 <a:t>GNS3</a:t>
               </a:r>
-              <a:r>
-                <a:rPr lang="ko-KR" sz="1050" b="1" dirty="0">
-                  <a:solidFill>
-                    <a:schemeClr val="lt1"/>
-                  </a:solidFill>
-                  <a:latin typeface="Noto Sans KR"/>
-                  <a:ea typeface="Noto Sans KR"/>
-                  <a:cs typeface="Noto Sans KR"/>
-                  <a:sym typeface="Noto Sans KR"/>
-                </a:rPr>
-                <a:t/>
-              </a:r>
               <a:br>
                 <a:rPr lang="ko-KR" sz="1050" b="1" dirty="0">
                   <a:solidFill>
@@ -19608,7 +19414,7 @@
                 </a:rPr>
               </a:br>
               <a:r>
-                <a:rPr lang="en-US" altLang="ko-KR" sz="1050" b="1" dirty="0" smtClean="0">
+                <a:rPr lang="en-US" altLang="ko-KR" sz="1050" b="1" dirty="0">
                   <a:solidFill>
                     <a:schemeClr val="dk1"/>
                   </a:solidFill>
@@ -19680,18 +19486,6 @@
                 </a:rPr>
                 <a:t>Putty</a:t>
               </a:r>
-              <a:r>
-                <a:rPr lang="ko-KR" sz="1050" b="1" dirty="0">
-                  <a:solidFill>
-                    <a:schemeClr val="lt1"/>
-                  </a:solidFill>
-                  <a:latin typeface="Noto Sans KR"/>
-                  <a:ea typeface="Noto Sans KR"/>
-                  <a:cs typeface="Noto Sans KR"/>
-                  <a:sym typeface="Noto Sans KR"/>
-                </a:rPr>
-                <a:t/>
-              </a:r>
               <a:br>
                 <a:rPr lang="ko-KR" sz="1050" b="1" dirty="0">
                   <a:solidFill>
@@ -19704,7 +19498,7 @@
                 </a:rPr>
               </a:br>
               <a:r>
-                <a:rPr lang="ko-KR" sz="1050" b="1" dirty="0" smtClean="0">
+                <a:rPr lang="ko-KR" sz="1050" b="1" dirty="0">
                   <a:solidFill>
                     <a:schemeClr val="dk1"/>
                   </a:solidFill>
@@ -19775,18 +19569,6 @@
                   <a:sym typeface="Noto Sans KR"/>
                 </a:rPr>
                 <a:t>NMAP</a:t>
-              </a:r>
-              <a:r>
-                <a:rPr lang="ko-KR" sz="1050" b="1" dirty="0">
-                  <a:solidFill>
-                    <a:schemeClr val="lt1"/>
-                  </a:solidFill>
-                  <a:latin typeface="Noto Sans KR"/>
-                  <a:ea typeface="Noto Sans KR"/>
-                  <a:cs typeface="Noto Sans KR"/>
-                  <a:sym typeface="Noto Sans KR"/>
-                </a:rPr>
-                <a:t/>
               </a:r>
               <a:br>
                 <a:rPr lang="ko-KR" sz="1050" b="1" dirty="0">
@@ -19872,18 +19654,6 @@
                 </a:rPr>
                 <a:t>Wireshark</a:t>
               </a:r>
-              <a:r>
-                <a:rPr lang="ko-KR" sz="1050" b="1" dirty="0">
-                  <a:solidFill>
-                    <a:schemeClr val="lt1"/>
-                  </a:solidFill>
-                  <a:latin typeface="Noto Sans KR"/>
-                  <a:ea typeface="Noto Sans KR"/>
-                  <a:cs typeface="Noto Sans KR"/>
-                  <a:sym typeface="Noto Sans KR"/>
-                </a:rPr>
-                <a:t/>
-              </a:r>
               <a:br>
                 <a:rPr lang="ko-KR" sz="1050" b="1" dirty="0">
                   <a:solidFill>
@@ -19896,7 +19666,7 @@
                 </a:rPr>
               </a:br>
               <a:r>
-                <a:rPr lang="ko-KR" sz="1050" b="1" dirty="0" smtClean="0">
+                <a:rPr lang="ko-KR" sz="1050" b="1" dirty="0">
                   <a:solidFill>
                     <a:schemeClr val="dk1"/>
                   </a:solidFill>
@@ -19908,7 +19678,7 @@
                 <a:t>4.4.</a:t>
               </a:r>
               <a:r>
-                <a:rPr lang="en-US" altLang="ko-KR" sz="1050" b="1" dirty="0" smtClean="0">
+                <a:rPr lang="en-US" altLang="ko-KR" sz="1050" b="1" dirty="0">
                   <a:solidFill>
                     <a:schemeClr val="dk1"/>
                   </a:solidFill>
@@ -19979,18 +19749,6 @@
                   <a:sym typeface="Noto Sans KR"/>
                 </a:rPr>
                 <a:t>VMware</a:t>
-              </a:r>
-              <a:r>
-                <a:rPr lang="ko-KR" sz="1050" b="1">
-                  <a:solidFill>
-                    <a:schemeClr val="lt1"/>
-                  </a:solidFill>
-                  <a:latin typeface="Noto Sans KR"/>
-                  <a:ea typeface="Noto Sans KR"/>
-                  <a:cs typeface="Noto Sans KR"/>
-                  <a:sym typeface="Noto Sans KR"/>
-                </a:rPr>
-                <a:t/>
               </a:r>
               <a:br>
                 <a:rPr lang="ko-KR" sz="1050" b="1">
@@ -20308,18 +20066,6 @@
               </a:rPr>
               <a:t>Rocky Linux</a:t>
             </a:r>
-            <a:r>
-              <a:rPr lang="ko-KR" sz="1050" b="1">
-                <a:solidFill>
-                  <a:schemeClr val="lt1"/>
-                </a:solidFill>
-                <a:latin typeface="Noto Sans KR"/>
-                <a:ea typeface="Noto Sans KR"/>
-                <a:cs typeface="Noto Sans KR"/>
-                <a:sym typeface="Noto Sans KR"/>
-              </a:rPr>
-              <a:t/>
-            </a:r>
             <a:br>
               <a:rPr lang="ko-KR" sz="1050" b="1">
                 <a:solidFill>
@@ -20403,18 +20149,6 @@
                 <a:sym typeface="Noto Sans KR"/>
               </a:rPr>
               <a:t>KALI</a:t>
-            </a:r>
-            <a:r>
-              <a:rPr lang="ko-KR" sz="1050" b="1">
-                <a:solidFill>
-                  <a:schemeClr val="lt1"/>
-                </a:solidFill>
-                <a:latin typeface="Noto Sans KR"/>
-                <a:ea typeface="Noto Sans KR"/>
-                <a:cs typeface="Noto Sans KR"/>
-                <a:sym typeface="Noto Sans KR"/>
-              </a:rPr>
-              <a:t/>
             </a:r>
             <a:br>
               <a:rPr lang="ko-KR" sz="1050" b="1">
@@ -20500,18 +20234,6 @@
               </a:rPr>
               <a:t>Ubuntu</a:t>
             </a:r>
-            <a:r>
-              <a:rPr lang="ko-KR" sz="1050" b="1" dirty="0">
-                <a:solidFill>
-                  <a:schemeClr val="lt1"/>
-                </a:solidFill>
-                <a:latin typeface="Noto Sans KR"/>
-                <a:ea typeface="Noto Sans KR"/>
-                <a:cs typeface="Noto Sans KR"/>
-                <a:sym typeface="Noto Sans KR"/>
-              </a:rPr>
-              <a:t/>
-            </a:r>
             <a:br>
               <a:rPr lang="ko-KR" sz="1050" b="1" dirty="0">
                 <a:solidFill>
@@ -20524,7 +20246,7 @@
               </a:rPr>
             </a:br>
             <a:r>
-              <a:rPr lang="en-US" altLang="ko-KR" sz="1050" b="1" dirty="0" smtClean="0">
+              <a:rPr lang="en-US" altLang="ko-KR" sz="1050" b="1" dirty="0">
                 <a:solidFill>
                   <a:schemeClr val="dk1"/>
                 </a:solidFill>
@@ -20680,18 +20402,6 @@
               </a:rPr>
               <a:t>Windows</a:t>
             </a:r>
-            <a:r>
-              <a:rPr lang="ko-KR" sz="1050" b="1">
-                <a:solidFill>
-                  <a:schemeClr val="lt1"/>
-                </a:solidFill>
-                <a:latin typeface="Noto Sans KR"/>
-                <a:ea typeface="Noto Sans KR"/>
-                <a:cs typeface="Noto Sans KR"/>
-                <a:sym typeface="Noto Sans KR"/>
-              </a:rPr>
-              <a:t/>
-            </a:r>
             <a:br>
               <a:rPr lang="ko-KR" sz="1050" b="1">
                 <a:solidFill>
@@ -20775,18 +20485,6 @@
                 <a:sym typeface="Noto Sans KR"/>
               </a:rPr>
               <a:t>Php</a:t>
-            </a:r>
-            <a:r>
-              <a:rPr lang="ko-KR" sz="1050" b="1">
-                <a:solidFill>
-                  <a:schemeClr val="lt1"/>
-                </a:solidFill>
-                <a:latin typeface="Noto Sans KR"/>
-                <a:ea typeface="Noto Sans KR"/>
-                <a:cs typeface="Noto Sans KR"/>
-                <a:sym typeface="Noto Sans KR"/>
-              </a:rPr>
-              <a:t/>
             </a:r>
             <a:br>
               <a:rPr lang="ko-KR" sz="1050" b="1">
@@ -20872,18 +20570,6 @@
               </a:rPr>
               <a:t>MariaDB</a:t>
             </a:r>
-            <a:r>
-              <a:rPr lang="ko-KR" sz="1050" b="1" dirty="0">
-                <a:solidFill>
-                  <a:schemeClr val="lt1"/>
-                </a:solidFill>
-                <a:latin typeface="Noto Sans KR"/>
-                <a:ea typeface="Noto Sans KR"/>
-                <a:cs typeface="Noto Sans KR"/>
-                <a:sym typeface="Noto Sans KR"/>
-              </a:rPr>
-              <a:t/>
-            </a:r>
             <a:br>
               <a:rPr lang="ko-KR" sz="1050" b="1" dirty="0">
                 <a:solidFill>
@@ -20896,7 +20582,7 @@
               </a:rPr>
             </a:br>
             <a:r>
-              <a:rPr lang="en-US" altLang="ko-KR" sz="1050" b="1" dirty="0" smtClean="0">
+              <a:rPr lang="en-US" altLang="ko-KR" sz="1050" b="1" dirty="0">
                 <a:solidFill>
                   <a:schemeClr val="dk1"/>
                 </a:solidFill>
@@ -20968,18 +20654,6 @@
               </a:rPr>
               <a:t>MySQL</a:t>
             </a:r>
-            <a:r>
-              <a:rPr lang="ko-KR" sz="1050" b="1" dirty="0">
-                <a:solidFill>
-                  <a:schemeClr val="lt1"/>
-                </a:solidFill>
-                <a:latin typeface="Noto Sans KR"/>
-                <a:ea typeface="Noto Sans KR"/>
-                <a:cs typeface="Noto Sans KR"/>
-                <a:sym typeface="Noto Sans KR"/>
-              </a:rPr>
-              <a:t/>
-            </a:r>
             <a:br>
               <a:rPr lang="ko-KR" sz="1050" b="1" dirty="0">
                 <a:solidFill>
@@ -20992,7 +20666,7 @@
               </a:rPr>
             </a:br>
             <a:r>
-              <a:rPr lang="en-US" altLang="ko-KR" sz="1050" b="1" dirty="0" smtClean="0">
+              <a:rPr lang="en-US" altLang="ko-KR" sz="1050" b="1" dirty="0">
                 <a:solidFill>
                   <a:schemeClr val="dk1"/>
                 </a:solidFill>
@@ -21359,6 +21033,13 @@
               <a:noFill/>
             </a:ln>
           </p:spPr>
+          <p:txBody>
+            <a:bodyPr/>
+            <a:lstStyle/>
+            <a:p>
+              <a:endParaRPr lang="ko-KR" altLang="en-US"/>
+            </a:p>
+          </p:txBody>
         </p:sp>
         <p:sp>
           <p:nvSpPr>
@@ -21767,7 +21448,7 @@
                   <a:defRPr/>
                 </a:pPr>
                 <a:r>
-                  <a:rPr lang="ko-KR" altLang="en-US" sz="1400" b="1" noProof="0" dirty="0" smtClean="0">
+                  <a:rPr lang="ko-KR" altLang="en-US" sz="1400" b="1" noProof="0" dirty="0">
                     <a:solidFill>
                       <a:schemeClr val="tx1"/>
                     </a:solidFill>
@@ -21911,7 +21592,7 @@
                   <a:defRPr/>
                 </a:pPr>
                 <a:r>
-                  <a:rPr lang="ko-KR" altLang="en-US" sz="1400" b="1" dirty="0" smtClean="0">
+                  <a:rPr lang="ko-KR" altLang="en-US" sz="1400" b="1" dirty="0">
                     <a:solidFill>
                       <a:schemeClr val="tx1"/>
                     </a:solidFill>
@@ -22055,7 +21736,7 @@
                   <a:defRPr/>
                 </a:pPr>
                 <a:r>
-                  <a:rPr lang="ko-KR" altLang="en-US" sz="1400" b="1" i="0" u="none" strike="noStrike" kern="1200" cap="none" spc="0" normalizeH="0" baseline="0" noProof="0" dirty="0" smtClean="0">
+                  <a:rPr lang="ko-KR" altLang="en-US" sz="1400" b="1" i="0" u="none" strike="noStrike" kern="1200" cap="none" spc="0" normalizeH="0" baseline="0" noProof="0" dirty="0">
                     <a:ln>
                       <a:noFill/>
                     </a:ln>
@@ -22070,19 +21751,6 @@
                   </a:rPr>
                   <a:t>협업 도구</a:t>
                 </a:r>
-                <a:endParaRPr lang="ko-KR" altLang="en-US" sz="1400" b="1" i="0" u="none" strike="noStrike" kern="1200" cap="none" spc="0" normalizeH="0" baseline="0" noProof="0" dirty="0">
-                  <a:ln>
-                    <a:noFill/>
-                  </a:ln>
-                  <a:solidFill>
-                    <a:schemeClr val="tx1"/>
-                  </a:solidFill>
-                  <a:effectLst/>
-                  <a:uLnTx/>
-                  <a:uFillTx/>
-                  <a:latin typeface="Noto Sans KR Black" panose="020B0200000000000000" pitchFamily="50" charset="-127"/>
-                  <a:ea typeface="Noto Sans KR Black" panose="020B0200000000000000" pitchFamily="50" charset="-127"/>
-                </a:endParaRPr>
               </a:p>
             </p:txBody>
           </p:sp>
@@ -22205,7 +21873,7 @@
                   <a:defRPr/>
                 </a:pPr>
                 <a:r>
-                  <a:rPr lang="ko-KR" altLang="en-US" sz="1400" b="1" i="0" u="none" strike="noStrike" kern="1200" cap="none" spc="0" normalizeH="0" baseline="0" noProof="0" dirty="0" smtClean="0">
+                  <a:rPr lang="ko-KR" altLang="en-US" sz="1400" b="1" i="0" u="none" strike="noStrike" kern="1200" cap="none" spc="0" normalizeH="0" baseline="0" noProof="0" dirty="0">
                     <a:ln>
                       <a:noFill/>
                     </a:ln>
@@ -22220,19 +21888,6 @@
                   </a:rPr>
                   <a:t>협업 도구</a:t>
                 </a:r>
-                <a:endParaRPr lang="ko-KR" altLang="en-US" sz="1400" b="1" i="0" u="none" strike="noStrike" kern="1200" cap="none" spc="0" normalizeH="0" baseline="0" noProof="0" dirty="0">
-                  <a:ln>
-                    <a:noFill/>
-                  </a:ln>
-                  <a:solidFill>
-                    <a:schemeClr val="tx1"/>
-                  </a:solidFill>
-                  <a:effectLst/>
-                  <a:uLnTx/>
-                  <a:uFillTx/>
-                  <a:latin typeface="Noto Sans KR Black" panose="020B0200000000000000" pitchFamily="50" charset="-127"/>
-                  <a:ea typeface="Noto Sans KR Black" panose="020B0200000000000000" pitchFamily="50" charset="-127"/>
-                </a:endParaRPr>
               </a:p>
             </p:txBody>
           </p:sp>
@@ -22306,7 +21961,7 @@
               <a:buNone/>
             </a:pPr>
             <a:r>
-              <a:rPr lang="en-US" altLang="ko-KR" sz="1050" b="1" dirty="0" smtClean="0">
+              <a:rPr lang="en-US" altLang="ko-KR" sz="1050" b="1" dirty="0">
                 <a:solidFill>
                   <a:schemeClr val="dk1"/>
                 </a:solidFill>
@@ -22317,20 +21972,8 @@
               </a:rPr>
               <a:t>Burp Suite</a:t>
             </a:r>
-            <a:r>
-              <a:rPr lang="ko-KR" sz="1050" b="1" dirty="0" smtClean="0">
-                <a:solidFill>
-                  <a:schemeClr val="lt1"/>
-                </a:solidFill>
-                <a:latin typeface="Noto Sans KR"/>
-                <a:ea typeface="Noto Sans KR"/>
-                <a:cs typeface="Noto Sans KR"/>
-                <a:sym typeface="Noto Sans KR"/>
-              </a:rPr>
-              <a:t/>
-            </a:r>
             <a:br>
-              <a:rPr lang="ko-KR" sz="1050" b="1" dirty="0" smtClean="0">
+              <a:rPr lang="ko-KR" sz="1050" b="1" dirty="0">
                 <a:solidFill>
                   <a:schemeClr val="lt1"/>
                 </a:solidFill>
@@ -22341,7 +21984,7 @@
               </a:rPr>
             </a:br>
             <a:r>
-              <a:rPr lang="en-US" altLang="ko-KR" sz="1050" b="1" dirty="0" smtClean="0">
+              <a:rPr lang="en-US" altLang="ko-KR" sz="1050" b="1" dirty="0">
                 <a:solidFill>
                   <a:schemeClr val="dk1"/>
                 </a:solidFill>
@@ -22374,13 +22017,6 @@
   <p:clrMapOvr>
     <a:masterClrMapping/>
   </p:clrMapOvr>
-  <p:timing>
-    <p:tnLst>
-      <p:par>
-        <p:cTn id="1" dur="indefinite" restart="never" nodeType="tmRoot"/>
-      </p:par>
-    </p:tnLst>
-  </p:timing>
 </p:sld>
 </file>
 
@@ -22417,10 +22053,9 @@
           <a:lstStyle/>
           <a:p>
             <a:r>
-              <a:rPr lang="ko-KR" altLang="en-US" dirty="0" smtClean="0"/>
+              <a:rPr lang="ko-KR" altLang="en-US" dirty="0"/>
               <a:t>프로젝트 기간</a:t>
             </a:r>
-            <a:endParaRPr lang="ko-KR" altLang="en-US" dirty="0"/>
           </a:p>
         </p:txBody>
       </p:sp>
@@ -23207,16 +22842,6 @@
                         </a:rPr>
                         <a:t>프로젝트</a:t>
                       </a:r>
-                      <a:r>
-                        <a:rPr lang="en-US" altLang="ko-KR" sz="1200" b="1" dirty="0">
-                          <a:solidFill>
-                            <a:srgbClr val="FFFFFF"/>
-                          </a:solidFill>
-                          <a:latin typeface="Noto Sans KR"/>
-                          <a:ea typeface="Noto Sans KR" panose="020B0200000000000000" pitchFamily="50" charset="-127"/>
-                        </a:rPr>
-                        <a:t/>
-                      </a:r>
                       <a:br>
                         <a:rPr lang="en-US" altLang="ko-KR" sz="1200" b="1" dirty="0">
                           <a:solidFill>
@@ -25836,13 +25461,6 @@
                         </a:rPr>
                         <a:t>취약점 위험 분석</a:t>
                       </a:r>
-                      <a:r>
-                        <a:rPr lang="en-US" altLang="ko-KR" sz="900" b="1" dirty="0">
-                          <a:latin typeface="Noto Sans KR Medium" panose="020B0200000000000000" pitchFamily="50" charset="-127"/>
-                          <a:ea typeface="Noto Sans KR Medium"/>
-                        </a:rPr>
-                        <a:t/>
-                      </a:r>
                       <a:br>
                         <a:rPr lang="en-US" altLang="ko-KR" sz="900" b="1" dirty="0">
                           <a:latin typeface="Noto Sans KR Medium" panose="020B0200000000000000" pitchFamily="50" charset="-127"/>
@@ -26355,16 +25973,6 @@
                           <a:ea typeface="Noto Sans KR" panose="020B0200000000000000" pitchFamily="50" charset="-127"/>
                         </a:rPr>
                         <a:t>보안대책 </a:t>
-                      </a:r>
-                      <a:r>
-                        <a:rPr lang="en-US" altLang="ko-KR" sz="1200" b="1" dirty="0">
-                          <a:solidFill>
-                            <a:srgbClr val="FFFFFF"/>
-                          </a:solidFill>
-                          <a:latin typeface="Noto Sans KR"/>
-                          <a:ea typeface="Noto Sans KR" panose="020B0200000000000000" pitchFamily="50" charset="-127"/>
-                        </a:rPr>
-                        <a:t/>
                       </a:r>
                       <a:br>
                         <a:rPr lang="en-US" altLang="ko-KR" sz="1200" b="1" dirty="0">
@@ -26924,13 +26532,6 @@
                           <a:ea typeface="Noto Sans KR Medium"/>
                         </a:rPr>
                         <a:t>인프라 구성 및 </a:t>
-                      </a:r>
-                      <a:r>
-                        <a:rPr lang="en-US" altLang="ko-KR" sz="900" b="1" dirty="0">
-                          <a:latin typeface="Noto Sans KR Medium" panose="020B0200000000000000" pitchFamily="50" charset="-127"/>
-                          <a:ea typeface="Noto Sans KR Medium"/>
-                        </a:rPr>
-                        <a:t/>
                       </a:r>
                       <a:br>
                         <a:rPr lang="en-US" altLang="ko-KR" sz="900" b="1" dirty="0">
@@ -27542,13 +27143,6 @@
                         </a:rPr>
                         <a:t>인프라 취약점 </a:t>
                       </a:r>
-                      <a:r>
-                        <a:rPr lang="en-US" altLang="ko-KR" sz="900" b="1" dirty="0">
-                          <a:latin typeface="Noto Sans KR Medium" panose="020B0200000000000000" pitchFamily="50" charset="-127"/>
-                          <a:ea typeface="Noto Sans KR Medium"/>
-                        </a:rPr>
-                        <a:t/>
-                      </a:r>
                       <a:br>
                         <a:rPr lang="en-US" altLang="ko-KR" sz="900" b="1" dirty="0">
                           <a:latin typeface="Noto Sans KR Medium" panose="020B0200000000000000" pitchFamily="50" charset="-127"/>
@@ -29889,16 +29483,6 @@
                           <a:ea typeface="Noto Sans KR" panose="020B0200000000000000" pitchFamily="50" charset="-127"/>
                         </a:rPr>
                         <a:t>문서화 </a:t>
-                      </a:r>
-                      <a:r>
-                        <a:rPr lang="en-US" altLang="ko-KR" sz="1200" b="1" dirty="0">
-                          <a:solidFill>
-                            <a:srgbClr val="FFFFFF"/>
-                          </a:solidFill>
-                          <a:latin typeface="Noto Sans KR"/>
-                          <a:ea typeface="Noto Sans KR" panose="020B0200000000000000" pitchFamily="50" charset="-127"/>
-                        </a:rPr>
-                        <a:t/>
                       </a:r>
                       <a:br>
                         <a:rPr lang="en-US" altLang="ko-KR" sz="1200" b="1" dirty="0">
@@ -31157,13 +30741,6 @@
   <p:clrMapOvr>
     <a:masterClrMapping/>
   </p:clrMapOvr>
-  <p:timing>
-    <p:tnLst>
-      <p:par>
-        <p:cTn id="1" dur="indefinite" restart="never" nodeType="tmRoot"/>
-      </p:par>
-    </p:tnLst>
-  </p:timing>
 </p:sld>
 </file>
 
@@ -31200,7 +30777,7 @@
           <a:lstStyle/>
           <a:p>
             <a:r>
-              <a:rPr lang="ko-KR" altLang="en-US" dirty="0" err="1" smtClean="0"/>
+              <a:rPr lang="ko-KR" altLang="en-US" dirty="0" err="1"/>
               <a:t>수행인력</a:t>
             </a:r>
             <a:endParaRPr lang="ko-KR" altLang="en-US" dirty="0"/>
@@ -31275,7 +30852,7 @@
                 <a:defRPr/>
               </a:pPr>
               <a:r>
-                <a:rPr lang="en-US" altLang="ko-KR" sz="1300" b="1" dirty="0" smtClean="0">
+                <a:rPr lang="en-US" altLang="ko-KR" sz="1300" b="1" dirty="0">
                   <a:solidFill>
                     <a:schemeClr val="tx1"/>
                   </a:solidFill>
@@ -31295,7 +30872,7 @@
                 <a:defRPr/>
               </a:pPr>
               <a:r>
-                <a:rPr lang="ko-KR" altLang="en-US" sz="1300" b="1" dirty="0" smtClean="0">
+                <a:rPr lang="ko-KR" altLang="en-US" sz="1300" b="1" dirty="0">
                   <a:solidFill>
                     <a:schemeClr val="tx1"/>
                   </a:solidFill>
@@ -31304,13 +30881,6 @@
                 </a:rPr>
                 <a:t>배포</a:t>
               </a:r>
-              <a:endParaRPr lang="ko-KR" altLang="en-US" sz="1300" b="1" dirty="0">
-                <a:solidFill>
-                  <a:schemeClr val="tx1"/>
-                </a:solidFill>
-                <a:latin typeface="Noto Sans KR Medium" panose="020B0200000000000000" pitchFamily="50" charset="-127"/>
-                <a:ea typeface="Noto Sans KR Medium"/>
-              </a:endParaRPr>
             </a:p>
             <a:p>
               <a:pPr marL="285750" indent="-285750">
@@ -31322,7 +30892,7 @@
                 <a:defRPr/>
               </a:pPr>
               <a:r>
-                <a:rPr lang="ko-KR" altLang="en-US" sz="1300" b="1" dirty="0" smtClean="0">
+                <a:rPr lang="ko-KR" altLang="en-US" sz="1300" b="1" dirty="0">
                   <a:solidFill>
                     <a:schemeClr val="tx1"/>
                   </a:solidFill>
@@ -31331,18 +30901,8 @@
                 </a:rPr>
                 <a:t>시나리오 기반</a:t>
               </a:r>
-              <a:r>
-                <a:rPr lang="en-US" altLang="ko-KR" sz="1300" b="1" dirty="0" smtClean="0">
-                  <a:solidFill>
-                    <a:schemeClr val="tx1"/>
-                  </a:solidFill>
-                  <a:latin typeface="Noto Sans KR Medium" panose="020B0200000000000000" pitchFamily="50" charset="-127"/>
-                  <a:ea typeface="Noto Sans KR Medium"/>
-                </a:rPr>
-                <a:t/>
-              </a:r>
               <a:br>
-                <a:rPr lang="en-US" altLang="ko-KR" sz="1300" b="1" dirty="0" smtClean="0">
+                <a:rPr lang="en-US" altLang="ko-KR" sz="1300" b="1" dirty="0">
                   <a:solidFill>
                     <a:schemeClr val="tx1"/>
                   </a:solidFill>
@@ -31351,7 +30911,7 @@
                 </a:rPr>
               </a:br>
               <a:r>
-                <a:rPr lang="ko-KR" altLang="en-US" sz="1300" b="1" dirty="0" smtClean="0">
+                <a:rPr lang="ko-KR" altLang="en-US" sz="1300" b="1" dirty="0">
                   <a:solidFill>
                     <a:schemeClr val="tx1"/>
                   </a:solidFill>
@@ -31360,18 +30920,8 @@
                 </a:rPr>
                 <a:t>모의해킹</a:t>
               </a:r>
-              <a:r>
-                <a:rPr lang="en-US" altLang="ko-KR" sz="1300" b="1" dirty="0" smtClean="0">
-                  <a:solidFill>
-                    <a:schemeClr val="tx1"/>
-                  </a:solidFill>
-                  <a:latin typeface="Noto Sans KR Medium" panose="020B0200000000000000" pitchFamily="50" charset="-127"/>
-                  <a:ea typeface="Noto Sans KR Medium"/>
-                </a:rPr>
-                <a:t/>
-              </a:r>
               <a:br>
-                <a:rPr lang="en-US" altLang="ko-KR" sz="1300" b="1" dirty="0" smtClean="0">
+                <a:rPr lang="en-US" altLang="ko-KR" sz="1300" b="1" dirty="0">
                   <a:solidFill>
                     <a:schemeClr val="tx1"/>
                   </a:solidFill>
@@ -31380,7 +30930,7 @@
                 </a:rPr>
               </a:br>
               <a:r>
-                <a:rPr lang="en-US" altLang="ko-KR" sz="1300" b="1" dirty="0" smtClean="0">
+                <a:rPr lang="en-US" altLang="ko-KR" sz="1300" b="1" dirty="0">
                   <a:solidFill>
                     <a:schemeClr val="tx1"/>
                   </a:solidFill>
@@ -31390,7 +30940,7 @@
                 <a:t>(</a:t>
               </a:r>
               <a:r>
-                <a:rPr lang="ko-KR" altLang="en-US" sz="1300" b="1" dirty="0" smtClean="0">
+                <a:rPr lang="ko-KR" altLang="en-US" sz="1300" b="1" dirty="0">
                   <a:solidFill>
                     <a:schemeClr val="tx1"/>
                   </a:solidFill>
@@ -31400,7 +30950,7 @@
                 <a:t>본사</a:t>
               </a:r>
               <a:r>
-                <a:rPr lang="en-US" altLang="ko-KR" sz="1300" b="1" dirty="0" smtClean="0">
+                <a:rPr lang="en-US" altLang="ko-KR" sz="1300" b="1" dirty="0">
                   <a:solidFill>
                     <a:schemeClr val="tx1"/>
                   </a:solidFill>
@@ -31410,7 +30960,7 @@
                 <a:t>/</a:t>
               </a:r>
               <a:r>
-                <a:rPr lang="ko-KR" altLang="en-US" sz="1300" b="1" dirty="0" smtClean="0">
+                <a:rPr lang="ko-KR" altLang="en-US" sz="1300" b="1" dirty="0">
                   <a:solidFill>
                     <a:schemeClr val="tx1"/>
                   </a:solidFill>
@@ -31420,7 +30970,7 @@
                 <a:t>지사</a:t>
               </a:r>
               <a:r>
-                <a:rPr lang="en-US" altLang="ko-KR" sz="1300" b="1" dirty="0" smtClean="0">
+                <a:rPr lang="en-US" altLang="ko-KR" sz="1300" b="1" dirty="0">
                   <a:solidFill>
                     <a:schemeClr val="tx1"/>
                   </a:solidFill>
@@ -31572,7 +31122,7 @@
                   <a:defRPr/>
                 </a:pPr>
                 <a:r>
-                  <a:rPr lang="ko-KR" altLang="en-US" sz="1400" b="1" dirty="0" err="1" smtClean="0">
+                  <a:rPr lang="ko-KR" altLang="en-US" sz="1400" b="1" dirty="0" err="1">
                     <a:solidFill>
                       <a:schemeClr val="tx1"/>
                     </a:solidFill>
@@ -31731,7 +31281,7 @@
                   <a:defRPr/>
                 </a:pPr>
                 <a:r>
-                  <a:rPr lang="ko-KR" altLang="en-US" sz="1400" b="1" dirty="0" err="1" smtClean="0">
+                  <a:rPr lang="ko-KR" altLang="en-US" sz="1400" b="1" dirty="0" err="1">
                     <a:solidFill>
                       <a:schemeClr val="tx1"/>
                     </a:solidFill>
@@ -31741,16 +31291,6 @@
                   <a:t>윤철민</a:t>
                 </a:r>
                 <a:r>
-                  <a:rPr lang="ko-KR" altLang="en-US" sz="1400" b="1" dirty="0" smtClean="0">
-                    <a:solidFill>
-                      <a:schemeClr val="tx1"/>
-                    </a:solidFill>
-                    <a:latin typeface="Noto Sans KR Black" panose="020B0200000000000000" pitchFamily="50" charset="-127"/>
-                    <a:ea typeface="Noto Sans KR Black"/>
-                  </a:rPr>
-                  <a:t> </a:t>
-                </a:r>
-                <a:r>
                   <a:rPr lang="ko-KR" altLang="en-US" sz="1400" b="1" dirty="0">
                     <a:solidFill>
                       <a:schemeClr val="tx1"/>
@@ -31758,10 +31298,10 @@
                     <a:latin typeface="Noto Sans KR Black" panose="020B0200000000000000" pitchFamily="50" charset="-127"/>
                     <a:ea typeface="Noto Sans KR Black"/>
                   </a:rPr>
-                  <a:t>(</a:t>
+                  <a:t> (</a:t>
                 </a:r>
                 <a:r>
-                  <a:rPr lang="ko-KR" altLang="en-US" sz="1400" b="1" dirty="0" err="1" smtClean="0">
+                  <a:rPr lang="ko-KR" altLang="en-US" sz="1400" b="1" dirty="0" err="1">
                     <a:solidFill>
                       <a:schemeClr val="tx1"/>
                     </a:solidFill>
@@ -31771,7 +31311,7 @@
                   <a:t>P</a:t>
                 </a:r>
                 <a:r>
-                  <a:rPr lang="en-US" altLang="ko-KR" sz="1400" b="1" dirty="0" smtClean="0">
+                  <a:rPr lang="en-US" altLang="ko-KR" sz="1400" b="1" dirty="0">
                     <a:solidFill>
                       <a:schemeClr val="tx1"/>
                     </a:solidFill>
@@ -31781,7 +31321,7 @@
                   <a:t>L</a:t>
                 </a:r>
                 <a:r>
-                  <a:rPr lang="ko-KR" altLang="en-US" sz="1400" b="1" dirty="0" smtClean="0">
+                  <a:rPr lang="ko-KR" altLang="en-US" sz="1400" b="1" dirty="0">
                     <a:solidFill>
                       <a:schemeClr val="tx1"/>
                     </a:solidFill>
@@ -32066,7 +31606,7 @@
                   <a:defRPr/>
                 </a:pPr>
                 <a:r>
-                  <a:rPr lang="ko-KR" altLang="en-US" sz="1400" b="1" i="0" u="none" strike="noStrike" kern="1200" cap="none" spc="0" normalizeH="0" baseline="0" noProof="0" dirty="0" smtClean="0">
+                  <a:rPr lang="ko-KR" altLang="en-US" sz="1400" b="1" i="0" u="none" strike="noStrike" kern="1200" cap="none" spc="0" normalizeH="0" baseline="0" noProof="0" dirty="0">
                     <a:ln>
                       <a:noFill/>
                     </a:ln>
@@ -32081,19 +31621,6 @@
                   </a:rPr>
                   <a:t>서정원</a:t>
                 </a:r>
-                <a:endParaRPr lang="ko-KR" altLang="en-US" sz="1400" b="1" i="0" u="none" strike="noStrike" kern="1200" cap="none" spc="0" normalizeH="0" baseline="0" noProof="0" dirty="0">
-                  <a:ln>
-                    <a:noFill/>
-                  </a:ln>
-                  <a:solidFill>
-                    <a:schemeClr val="tx1"/>
-                  </a:solidFill>
-                  <a:effectLst/>
-                  <a:uLnTx/>
-                  <a:uFillTx/>
-                  <a:latin typeface="Noto Sans KR Black" panose="020B0200000000000000" pitchFamily="50" charset="-127"/>
-                  <a:ea typeface="Noto Sans KR Black" panose="020B0200000000000000" pitchFamily="50" charset="-127"/>
-                </a:endParaRPr>
               </a:p>
             </p:txBody>
           </p:sp>
@@ -32357,7 +31884,7 @@
                   <a:defRPr/>
                 </a:pPr>
                 <a:r>
-                  <a:rPr lang="ko-KR" altLang="en-US" sz="1400" b="1" dirty="0" smtClean="0">
+                  <a:rPr lang="ko-KR" altLang="en-US" sz="1400" b="1" dirty="0">
                     <a:solidFill>
                       <a:schemeClr val="tx1"/>
                     </a:solidFill>
@@ -32642,7 +32169,7 @@
                   <a:defRPr/>
                 </a:pPr>
                 <a:r>
-                  <a:rPr lang="ko-KR" altLang="en-US" sz="1400" b="1" noProof="0" dirty="0" smtClean="0">
+                  <a:rPr lang="ko-KR" altLang="en-US" sz="1400" b="1" noProof="0" dirty="0">
                     <a:solidFill>
                       <a:schemeClr val="tx1"/>
                     </a:solidFill>
@@ -32805,13 +32332,6 @@
   <p:clrMapOvr>
     <a:masterClrMapping/>
   </p:clrMapOvr>
-  <p:timing>
-    <p:tnLst>
-      <p:par>
-        <p:cTn id="1" dur="indefinite" restart="never" nodeType="tmRoot"/>
-      </p:par>
-    </p:tnLst>
-  </p:timing>
 </p:sld>
 </file>
 
@@ -32842,13 +32362,6 @@
   <p:clrMapOvr>
     <a:masterClrMapping/>
   </p:clrMapOvr>
-  <p:timing>
-    <p:tnLst>
-      <p:par>
-        <p:cTn id="1" dur="indefinite" restart="never" nodeType="tmRoot"/>
-      </p:par>
-    </p:tnLst>
-  </p:timing>
 </p:sld>
 </file>
 
@@ -32933,10 +32446,9 @@
           <a:lstStyle/>
           <a:p>
             <a:r>
-              <a:rPr lang="ko-KR" altLang="en-US" dirty="0" smtClean="0"/>
+              <a:rPr lang="ko-KR" altLang="en-US" dirty="0"/>
               <a:t>분석 및 점검</a:t>
             </a:r>
-            <a:endParaRPr lang="ko-KR" altLang="en-US" dirty="0"/>
           </a:p>
         </p:txBody>
       </p:sp>
@@ -32950,13 +32462,6 @@
   <p:clrMapOvr>
     <a:masterClrMapping/>
   </p:clrMapOvr>
-  <p:timing>
-    <p:tnLst>
-      <p:par>
-        <p:cTn id="1" dur="indefinite" restart="never" nodeType="tmRoot"/>
-      </p:par>
-    </p:tnLst>
-  </p:timing>
 </p:sld>
 </file>
 
@@ -32987,13 +32492,6 @@
   <p:clrMapOvr>
     <a:masterClrMapping/>
   </p:clrMapOvr>
-  <p:timing>
-    <p:tnLst>
-      <p:par>
-        <p:cTn id="1" dur="indefinite" restart="never" nodeType="tmRoot"/>
-      </p:par>
-    </p:tnLst>
-  </p:timing>
 </p:sld>
 </file>
 
@@ -33030,7 +32528,7 @@
           <a:lstStyle/>
           <a:p>
             <a:r>
-              <a:rPr lang="en-US" altLang="ko-KR" smtClean="0"/>
+              <a:rPr lang="en-US" altLang="ko-KR"/>
               <a:t> </a:t>
             </a:r>
             <a:endParaRPr lang="ko-KR" altLang="en-US" dirty="0"/>
@@ -33053,7 +32551,7 @@
           <a:lstStyle/>
           <a:p>
             <a:r>
-              <a:rPr lang="ko-KR" altLang="en-US" smtClean="0"/>
+              <a:rPr lang="ko-KR" altLang="en-US"/>
               <a:t>서서울</a:t>
             </a:r>
             <a:endParaRPr lang="ko-KR" altLang="en-US" dirty="0"/>
@@ -33076,53 +32574,53 @@
           <a:lstStyle/>
           <a:p>
             <a:r>
-              <a:rPr lang="en-US" altLang="ko-KR" dirty="0" smtClean="0"/>
+              <a:rPr lang="en-US" altLang="ko-KR" dirty="0"/>
               <a:t>PM</a:t>
             </a:r>
           </a:p>
           <a:p>
             <a:r>
-              <a:rPr lang="ko-KR" altLang="en-US" dirty="0" smtClean="0"/>
+              <a:rPr lang="ko-KR" altLang="en-US" dirty="0"/>
               <a:t>배포</a:t>
             </a:r>
           </a:p>
           <a:p>
             <a:r>
-              <a:rPr lang="ko-KR" altLang="en-US" dirty="0" smtClean="0"/>
+              <a:rPr lang="ko-KR" altLang="en-US" dirty="0"/>
               <a:t>시나리오 기반</a:t>
             </a:r>
             <a:r>
-              <a:rPr lang="en-US" altLang="ko-KR" dirty="0" smtClean="0"/>
+              <a:rPr lang="en-US" altLang="ko-KR" dirty="0"/>
               <a:t> </a:t>
             </a:r>
             <a:r>
-              <a:rPr lang="ko-KR" altLang="en-US" dirty="0" smtClean="0"/>
+              <a:rPr lang="ko-KR" altLang="en-US" dirty="0"/>
               <a:t>모의해킹</a:t>
             </a:r>
             <a:r>
-              <a:rPr lang="en-US" altLang="ko-KR" dirty="0" smtClean="0"/>
+              <a:rPr lang="en-US" altLang="ko-KR" dirty="0"/>
               <a:t> (</a:t>
             </a:r>
             <a:r>
-              <a:rPr lang="ko-KR" altLang="en-US" dirty="0" smtClean="0"/>
+              <a:rPr lang="ko-KR" altLang="en-US" dirty="0"/>
               <a:t>본사</a:t>
             </a:r>
             <a:r>
-              <a:rPr lang="en-US" altLang="ko-KR" dirty="0" smtClean="0"/>
+              <a:rPr lang="en-US" altLang="ko-KR" dirty="0"/>
               <a:t>/</a:t>
             </a:r>
             <a:r>
-              <a:rPr lang="ko-KR" altLang="en-US" dirty="0" smtClean="0"/>
+              <a:rPr lang="ko-KR" altLang="en-US" dirty="0"/>
               <a:t>지사</a:t>
             </a:r>
             <a:r>
-              <a:rPr lang="en-US" altLang="ko-KR" dirty="0" smtClean="0"/>
+              <a:rPr lang="en-US" altLang="ko-KR" dirty="0"/>
               <a:t>)</a:t>
             </a:r>
-            <a:endParaRPr lang="ko-KR" altLang="en-US" dirty="0" smtClean="0"/>
+            <a:endParaRPr lang="ko-KR" altLang="en-US" dirty="0"/>
           </a:p>
           <a:p>
-            <a:endParaRPr lang="en-US" altLang="ko-KR" dirty="0" smtClean="0"/>
+            <a:endParaRPr lang="en-US" altLang="ko-KR" dirty="0"/>
           </a:p>
         </p:txBody>
       </p:sp>
@@ -33136,13 +32634,6 @@
   <p:clrMapOvr>
     <a:masterClrMapping/>
   </p:clrMapOvr>
-  <p:timing>
-    <p:tnLst>
-      <p:par>
-        <p:cTn id="1" dur="indefinite" restart="never" nodeType="tmRoot"/>
-      </p:par>
-    </p:tnLst>
-  </p:timing>
 </p:sld>
 </file>
 
@@ -33179,19 +32670,19 @@
           <a:lstStyle/>
           <a:p>
             <a:r>
-              <a:rPr lang="ko-KR" altLang="en-US" dirty="0" smtClean="0"/>
+              <a:rPr lang="ko-KR" altLang="en-US" dirty="0"/>
               <a:t>시나리오 기반 모의해킹</a:t>
             </a:r>
             <a:r>
-              <a:rPr lang="en-US" altLang="ko-KR" dirty="0" smtClean="0"/>
+              <a:rPr lang="en-US" altLang="ko-KR" dirty="0"/>
               <a:t>(</a:t>
             </a:r>
             <a:r>
-              <a:rPr lang="ko-KR" altLang="en-US" dirty="0" smtClean="0"/>
+              <a:rPr lang="ko-KR" altLang="en-US" dirty="0"/>
               <a:t>지사</a:t>
             </a:r>
             <a:r>
-              <a:rPr lang="en-US" altLang="ko-KR" dirty="0" smtClean="0"/>
+              <a:rPr lang="en-US" altLang="ko-KR" dirty="0"/>
               <a:t>)</a:t>
             </a:r>
             <a:endParaRPr lang="ko-KR" altLang="en-US" dirty="0"/>
@@ -33214,7 +32705,7 @@
           <a:lstStyle/>
           <a:p>
             <a:r>
-              <a:rPr lang="ko-KR" altLang="en-US" smtClean="0"/>
+              <a:rPr lang="ko-KR" altLang="en-US"/>
               <a:t>서서울</a:t>
             </a:r>
             <a:endParaRPr lang="ko-KR" altLang="en-US" dirty="0"/>
@@ -33240,22 +32731,16 @@
               <a:rPr lang="en-US" altLang="ko-KR" dirty="0">
                 <a:latin typeface="Noto Sans KR Black" panose="020B0200000000000000"/>
               </a:rPr>
-              <a:t>SQL </a:t>
+              <a:t>SQL Injection </a:t>
             </a:r>
             <a:r>
-              <a:rPr lang="en-US" altLang="ko-KR" dirty="0" smtClean="0">
-                <a:latin typeface="Noto Sans KR Black" panose="020B0200000000000000"/>
-              </a:rPr>
-              <a:t>Injection </a:t>
-            </a:r>
-            <a:r>
-              <a:rPr lang="ko-KR" altLang="en-US" dirty="0" smtClean="0">
+              <a:rPr lang="ko-KR" altLang="en-US" dirty="0">
                 <a:latin typeface="Noto Sans KR Black" panose="020B0200000000000000"/>
               </a:rPr>
               <a:t>취약점 </a:t>
             </a:r>
             <a:r>
-              <a:rPr lang="en-US" altLang="ko-KR" dirty="0" smtClean="0">
+              <a:rPr lang="en-US" altLang="ko-KR" dirty="0">
                 <a:latin typeface="Noto Sans KR Black" panose="020B0200000000000000"/>
               </a:rPr>
               <a:t>(1)</a:t>
@@ -33385,13 +32870,6 @@
   <p:clrMapOvr>
     <a:masterClrMapping/>
   </p:clrMapOvr>
-  <p:timing>
-    <p:tnLst>
-      <p:par>
-        <p:cTn id="1" dur="indefinite" restart="never" nodeType="tmRoot"/>
-      </p:par>
-    </p:tnLst>
-  </p:timing>
 </p:sld>
 </file>
 
@@ -33428,19 +32906,19 @@
           <a:lstStyle/>
           <a:p>
             <a:r>
-              <a:rPr lang="ko-KR" altLang="en-US" dirty="0" smtClean="0"/>
+              <a:rPr lang="ko-KR" altLang="en-US" dirty="0"/>
               <a:t>시나리오 기반 모의해킹</a:t>
             </a:r>
             <a:r>
-              <a:rPr lang="en-US" altLang="ko-KR" dirty="0" smtClean="0"/>
+              <a:rPr lang="en-US" altLang="ko-KR" dirty="0"/>
               <a:t>(</a:t>
             </a:r>
             <a:r>
-              <a:rPr lang="ko-KR" altLang="en-US" dirty="0" smtClean="0"/>
+              <a:rPr lang="ko-KR" altLang="en-US" dirty="0"/>
               <a:t>지사</a:t>
             </a:r>
             <a:r>
-              <a:rPr lang="en-US" altLang="ko-KR" dirty="0" smtClean="0"/>
+              <a:rPr lang="en-US" altLang="ko-KR" dirty="0"/>
               <a:t>)</a:t>
             </a:r>
             <a:endParaRPr lang="ko-KR" altLang="en-US" dirty="0"/>
@@ -33463,7 +32941,7 @@
           <a:lstStyle/>
           <a:p>
             <a:r>
-              <a:rPr lang="ko-KR" altLang="en-US" smtClean="0"/>
+              <a:rPr lang="ko-KR" altLang="en-US"/>
               <a:t>서서울</a:t>
             </a:r>
             <a:endParaRPr lang="ko-KR" altLang="en-US" dirty="0"/>
@@ -33489,22 +32967,16 @@
               <a:rPr lang="en-US" altLang="ko-KR" dirty="0">
                 <a:latin typeface="Noto Sans KR Black" panose="020B0200000000000000"/>
               </a:rPr>
-              <a:t>SQL </a:t>
+              <a:t>SQL Injection </a:t>
             </a:r>
             <a:r>
-              <a:rPr lang="en-US" altLang="ko-KR" dirty="0" smtClean="0">
-                <a:latin typeface="Noto Sans KR Black" panose="020B0200000000000000"/>
-              </a:rPr>
-              <a:t>Injection </a:t>
-            </a:r>
-            <a:r>
-              <a:rPr lang="ko-KR" altLang="en-US" dirty="0" smtClean="0">
+              <a:rPr lang="ko-KR" altLang="en-US" dirty="0">
                 <a:latin typeface="Noto Sans KR Black" panose="020B0200000000000000"/>
               </a:rPr>
               <a:t>취약점 </a:t>
             </a:r>
             <a:r>
-              <a:rPr lang="en-US" altLang="ko-KR" dirty="0" smtClean="0">
+              <a:rPr lang="en-US" altLang="ko-KR" dirty="0">
                 <a:latin typeface="Noto Sans KR Black" panose="020B0200000000000000"/>
               </a:rPr>
               <a:t>(2)</a:t>
@@ -33513,37 +32985,6 @@
           </a:p>
         </p:txBody>
       </p:sp>
-      <p:pic>
-        <p:nvPicPr>
-          <p:cNvPr id="12" name="그림 개체 틀 11"/>
-          <p:cNvPicPr>
-            <a:picLocks noGrp="1" noChangeAspect="1"/>
-          </p:cNvPicPr>
-          <p:nvPr>
-            <p:ph type="pic" sz="quarter" idx="19"/>
-          </p:nvPr>
-        </p:nvPicPr>
-        <p:blipFill rotWithShape="1">
-          <a:blip r:embed="rId2">
-            <a:extLst>
-              <a:ext uri="{28A0092B-C50C-407E-A947-70E740481C1C}">
-                <a14:useLocalDpi xmlns:a14="http://schemas.microsoft.com/office/drawing/2010/main" val="0"/>
-              </a:ext>
-            </a:extLst>
-          </a:blip>
-          <a:srcRect l="31201" t="45489" r="32537" b="6030"/>
-          <a:stretch/>
-        </p:blipFill>
-        <p:spPr>
-          <a:xfrm>
-            <a:off x="2209050" y="2140996"/>
-            <a:ext cx="2033294" cy="1955092"/>
-          </a:xfrm>
-          <a:prstGeom prst="rect">
-            <a:avLst/>
-          </a:prstGeom>
-        </p:spPr>
-      </p:pic>
       <p:sp>
         <p:nvSpPr>
           <p:cNvPr id="9" name="텍스트 개체 틀 8"/>
@@ -33572,7 +33013,7 @@
           <p:nvPr/>
         </p:nvPicPr>
         <p:blipFill rotWithShape="1">
-          <a:blip r:embed="rId3">
+          <a:blip r:embed="rId2">
             <a:extLst>
               <a:ext uri="{28A0092B-C50C-407E-A947-70E740481C1C}">
                 <a14:useLocalDpi xmlns:a14="http://schemas.microsoft.com/office/drawing/2010/main" val="0"/>
@@ -33584,8 +33025,8 @@
         </p:blipFill>
         <p:spPr>
           <a:xfrm>
-            <a:off x="1211133" y="4531455"/>
-            <a:ext cx="2613006" cy="471544"/>
+            <a:off x="1337353" y="3067889"/>
+            <a:ext cx="3600000" cy="649657"/>
           </a:xfrm>
           <a:prstGeom prst="rect">
             <a:avLst/>
@@ -33601,7 +33042,7 @@
           <p:nvPr/>
         </p:nvPicPr>
         <p:blipFill rotWithShape="1">
-          <a:blip r:embed="rId4">
+          <a:blip r:embed="rId3">
             <a:extLst>
               <a:ext uri="{28A0092B-C50C-407E-A947-70E740481C1C}">
                 <a14:useLocalDpi xmlns:a14="http://schemas.microsoft.com/office/drawing/2010/main" val="0"/>
@@ -33613,8 +33054,8 @@
         </p:blipFill>
         <p:spPr>
           <a:xfrm>
-            <a:off x="1215030" y="5202594"/>
-            <a:ext cx="4021334" cy="219054"/>
+            <a:off x="661366" y="4217448"/>
+            <a:ext cx="5040000" cy="274544"/>
           </a:xfrm>
           <a:prstGeom prst="rect">
             <a:avLst/>
@@ -33630,7 +33071,7 @@
           <p:nvPr/>
         </p:nvPicPr>
         <p:blipFill rotWithShape="1">
-          <a:blip r:embed="rId4">
+          <a:blip r:embed="rId3">
             <a:extLst>
               <a:ext uri="{28A0092B-C50C-407E-A947-70E740481C1C}">
                 <a14:useLocalDpi xmlns:a14="http://schemas.microsoft.com/office/drawing/2010/main" val="0"/>
@@ -33642,8 +33083,8 @@
         </p:blipFill>
         <p:spPr>
           <a:xfrm>
-            <a:off x="1211133" y="5438366"/>
-            <a:ext cx="1831072" cy="587142"/>
+            <a:off x="1332441" y="4706065"/>
+            <a:ext cx="3600000" cy="1154357"/>
           </a:xfrm>
           <a:prstGeom prst="rect">
             <a:avLst/>
@@ -33659,7 +33100,7 @@
           <p:nvPr/>
         </p:nvPicPr>
         <p:blipFill rotWithShape="1">
-          <a:blip r:embed="rId3">
+          <a:blip r:embed="rId2">
             <a:extLst>
               <a:ext uri="{28A0092B-C50C-407E-A947-70E740481C1C}">
                 <a14:useLocalDpi xmlns:a14="http://schemas.microsoft.com/office/drawing/2010/main" val="0"/>
@@ -33671,14 +33112,232 @@
         </p:blipFill>
         <p:spPr>
           <a:xfrm>
-            <a:off x="1211852" y="4295683"/>
-            <a:ext cx="4005143" cy="211755"/>
+            <a:off x="661366" y="2534951"/>
+            <a:ext cx="5040000" cy="266469"/>
           </a:xfrm>
           <a:prstGeom prst="rect">
             <a:avLst/>
           </a:prstGeom>
         </p:spPr>
       </p:pic>
+      <p:sp>
+        <p:nvSpPr>
+          <p:cNvPr id="8" name="화살표: 아래쪽 7">
+            <a:extLst>
+              <a:ext uri="{FF2B5EF4-FFF2-40B4-BE49-F238E27FC236}">
+                <a16:creationId xmlns:a16="http://schemas.microsoft.com/office/drawing/2014/main" id="{21603795-C2C8-1DFC-4EDA-73B3B8843223}"/>
+              </a:ext>
+            </a:extLst>
+          </p:cNvPr>
+          <p:cNvSpPr/>
+          <p:nvPr/>
+        </p:nvSpPr>
+        <p:spPr>
+          <a:xfrm>
+            <a:off x="3059013" y="4473520"/>
+            <a:ext cx="156680" cy="269070"/>
+          </a:xfrm>
+          <a:prstGeom prst="downArrow">
+            <a:avLst/>
+          </a:prstGeom>
+        </p:spPr>
+        <p:style>
+          <a:lnRef idx="2">
+            <a:schemeClr val="accent2">
+              <a:shade val="15000"/>
+            </a:schemeClr>
+          </a:lnRef>
+          <a:fillRef idx="1">
+            <a:schemeClr val="accent2"/>
+          </a:fillRef>
+          <a:effectRef idx="0">
+            <a:schemeClr val="accent2"/>
+          </a:effectRef>
+          <a:fontRef idx="minor">
+            <a:schemeClr val="lt1"/>
+          </a:fontRef>
+        </p:style>
+        <p:txBody>
+          <a:bodyPr rtlCol="0" anchor="ctr"/>
+          <a:lstStyle/>
+          <a:p>
+            <a:pPr algn="ctr"/>
+            <a:endParaRPr lang="ko-KR" altLang="en-US"/>
+          </a:p>
+        </p:txBody>
+      </p:sp>
+      <p:sp>
+        <p:nvSpPr>
+          <p:cNvPr id="11" name="화살표: 아래쪽 10">
+            <a:extLst>
+              <a:ext uri="{FF2B5EF4-FFF2-40B4-BE49-F238E27FC236}">
+                <a16:creationId xmlns:a16="http://schemas.microsoft.com/office/drawing/2014/main" id="{791D6871-1BAA-A44A-AF79-E3D51E141BA8}"/>
+              </a:ext>
+            </a:extLst>
+          </p:cNvPr>
+          <p:cNvSpPr/>
+          <p:nvPr/>
+        </p:nvSpPr>
+        <p:spPr>
+          <a:xfrm>
+            <a:off x="3059013" y="2798819"/>
+            <a:ext cx="156680" cy="269070"/>
+          </a:xfrm>
+          <a:prstGeom prst="downArrow">
+            <a:avLst/>
+          </a:prstGeom>
+        </p:spPr>
+        <p:style>
+          <a:lnRef idx="2">
+            <a:schemeClr val="accent2">
+              <a:shade val="15000"/>
+            </a:schemeClr>
+          </a:lnRef>
+          <a:fillRef idx="1">
+            <a:schemeClr val="accent2"/>
+          </a:fillRef>
+          <a:effectRef idx="0">
+            <a:schemeClr val="accent2"/>
+          </a:effectRef>
+          <a:fontRef idx="minor">
+            <a:schemeClr val="lt1"/>
+          </a:fontRef>
+        </p:style>
+        <p:txBody>
+          <a:bodyPr rtlCol="0" anchor="ctr"/>
+          <a:lstStyle/>
+          <a:p>
+            <a:pPr algn="ctr"/>
+            <a:endParaRPr lang="ko-KR" altLang="en-US"/>
+          </a:p>
+        </p:txBody>
+      </p:sp>
+      <p:sp>
+        <p:nvSpPr>
+          <p:cNvPr id="13" name="사각형: 둥근 모서리 12">
+            <a:extLst>
+              <a:ext uri="{FF2B5EF4-FFF2-40B4-BE49-F238E27FC236}">
+                <a16:creationId xmlns:a16="http://schemas.microsoft.com/office/drawing/2014/main" id="{9F800E14-3613-BA72-A59F-E64CEAAA1A97}"/>
+              </a:ext>
+            </a:extLst>
+          </p:cNvPr>
+          <p:cNvSpPr/>
+          <p:nvPr/>
+        </p:nvSpPr>
+        <p:spPr>
+          <a:xfrm>
+            <a:off x="661366" y="2159000"/>
+            <a:ext cx="252000" cy="252000"/>
+          </a:xfrm>
+          <a:prstGeom prst="roundRect">
+            <a:avLst/>
+          </a:prstGeom>
+          <a:solidFill>
+            <a:srgbClr val="373E54"/>
+          </a:solidFill>
+        </p:spPr>
+        <p:style>
+          <a:lnRef idx="1">
+            <a:schemeClr val="accent1"/>
+          </a:lnRef>
+          <a:fillRef idx="2">
+            <a:schemeClr val="accent1"/>
+          </a:fillRef>
+          <a:effectRef idx="1">
+            <a:schemeClr val="accent1"/>
+          </a:effectRef>
+          <a:fontRef idx="minor">
+            <a:schemeClr val="dk1"/>
+          </a:fontRef>
+        </p:style>
+        <p:txBody>
+          <a:bodyPr rtlCol="0" anchor="ctr"/>
+          <a:lstStyle/>
+          <a:p>
+            <a:pPr algn="ctr"/>
+            <a:r>
+              <a:rPr lang="en-US" altLang="ko-KR" sz="1200" b="1" dirty="0">
+                <a:solidFill>
+                  <a:schemeClr val="bg1"/>
+                </a:solidFill>
+                <a:latin typeface="Noto Sans KR" panose="020B0200000000000000" pitchFamily="50" charset="-127"/>
+                <a:ea typeface="Noto Sans KR" panose="020B0200000000000000" pitchFamily="50" charset="-127"/>
+              </a:rPr>
+              <a:t>1</a:t>
+            </a:r>
+            <a:endParaRPr lang="ko-KR" altLang="en-US" sz="1200" b="1" dirty="0">
+              <a:solidFill>
+                <a:schemeClr val="bg1"/>
+              </a:solidFill>
+              <a:latin typeface="Noto Sans KR" panose="020B0200000000000000" pitchFamily="50" charset="-127"/>
+              <a:ea typeface="Noto Sans KR" panose="020B0200000000000000" pitchFamily="50" charset="-127"/>
+            </a:endParaRPr>
+          </a:p>
+        </p:txBody>
+      </p:sp>
+      <p:sp>
+        <p:nvSpPr>
+          <p:cNvPr id="19" name="사각형: 둥근 모서리 18">
+            <a:extLst>
+              <a:ext uri="{FF2B5EF4-FFF2-40B4-BE49-F238E27FC236}">
+                <a16:creationId xmlns:a16="http://schemas.microsoft.com/office/drawing/2014/main" id="{B4EC2CAE-C27F-4974-1320-0C83694B1E79}"/>
+              </a:ext>
+            </a:extLst>
+          </p:cNvPr>
+          <p:cNvSpPr/>
+          <p:nvPr/>
+        </p:nvSpPr>
+        <p:spPr>
+          <a:xfrm>
+            <a:off x="661366" y="3841497"/>
+            <a:ext cx="252000" cy="252000"/>
+          </a:xfrm>
+          <a:prstGeom prst="roundRect">
+            <a:avLst/>
+          </a:prstGeom>
+          <a:solidFill>
+            <a:srgbClr val="373E54"/>
+          </a:solidFill>
+        </p:spPr>
+        <p:style>
+          <a:lnRef idx="1">
+            <a:schemeClr val="accent1"/>
+          </a:lnRef>
+          <a:fillRef idx="2">
+            <a:schemeClr val="accent1"/>
+          </a:fillRef>
+          <a:effectRef idx="1">
+            <a:schemeClr val="accent1"/>
+          </a:effectRef>
+          <a:fontRef idx="minor">
+            <a:schemeClr val="dk1"/>
+          </a:fontRef>
+        </p:style>
+        <p:txBody>
+          <a:bodyPr rtlCol="0" anchor="ctr"/>
+          <a:lstStyle/>
+          <a:p>
+            <a:pPr algn="ctr"/>
+            <a:r>
+              <a:rPr lang="en-US" altLang="ko-KR" sz="1200" b="1" dirty="0">
+                <a:solidFill>
+                  <a:schemeClr val="bg1"/>
+                </a:solidFill>
+                <a:latin typeface="Noto Sans KR" panose="020B0200000000000000" pitchFamily="50" charset="-127"/>
+                <a:ea typeface="Noto Sans KR" panose="020B0200000000000000" pitchFamily="50" charset="-127"/>
+              </a:rPr>
+              <a:t>2</a:t>
+            </a:r>
+            <a:endParaRPr lang="ko-KR" altLang="en-US" sz="1200" b="1" dirty="0">
+              <a:solidFill>
+                <a:schemeClr val="bg1"/>
+              </a:solidFill>
+              <a:latin typeface="Noto Sans KR" panose="020B0200000000000000" pitchFamily="50" charset="-127"/>
+              <a:ea typeface="Noto Sans KR" panose="020B0200000000000000" pitchFamily="50" charset="-127"/>
+            </a:endParaRPr>
+          </a:p>
+        </p:txBody>
+      </p:sp>
     </p:spTree>
     <p:extLst>
       <p:ext uri="{BB962C8B-B14F-4D97-AF65-F5344CB8AC3E}">
@@ -33689,13 +33348,6 @@
   <p:clrMapOvr>
     <a:masterClrMapping/>
   </p:clrMapOvr>
-  <p:timing>
-    <p:tnLst>
-      <p:par>
-        <p:cTn id="1" dur="indefinite" restart="never" nodeType="tmRoot"/>
-      </p:par>
-    </p:tnLst>
-  </p:timing>
 </p:sld>
 </file>
 
@@ -33767,7 +33419,7 @@
           <a:lstStyle/>
           <a:p>
             <a:r>
-              <a:rPr lang="ko-KR" altLang="en-US" smtClean="0"/>
+              <a:rPr lang="ko-KR" altLang="en-US"/>
               <a:t>서서울</a:t>
             </a:r>
             <a:endParaRPr lang="ko-KR" altLang="en-US" dirty="0"/>
@@ -33790,14 +33442,13 @@
           <a:lstStyle/>
           <a:p>
             <a:r>
-              <a:rPr lang="en-US" altLang="ko-KR" dirty="0" smtClean="0"/>
+              <a:rPr lang="en-US" altLang="ko-KR" dirty="0"/>
               <a:t>IDOR </a:t>
             </a:r>
             <a:r>
-              <a:rPr lang="ko-KR" altLang="en-US" dirty="0" smtClean="0"/>
+              <a:rPr lang="ko-KR" altLang="en-US" dirty="0"/>
               <a:t>취약점</a:t>
             </a:r>
-            <a:endParaRPr lang="ko-KR" altLang="en-US" dirty="0"/>
           </a:p>
         </p:txBody>
       </p:sp>
@@ -33862,13 +33513,6 @@
   <p:clrMapOvr>
     <a:masterClrMapping/>
   </p:clrMapOvr>
-  <p:timing>
-    <p:tnLst>
-      <p:par>
-        <p:cTn id="1" dur="indefinite" restart="never" nodeType="tmRoot"/>
-      </p:par>
-    </p:tnLst>
-  </p:timing>
 </p:sld>
 </file>
 
@@ -33899,13 +33543,6 @@
   <p:clrMapOvr>
     <a:masterClrMapping/>
   </p:clrMapOvr>
-  <p:timing>
-    <p:tnLst>
-      <p:par>
-        <p:cTn id="1" dur="indefinite" restart="never" nodeType="tmRoot"/>
-      </p:par>
-    </p:tnLst>
-  </p:timing>
 </p:sld>
 </file>
 
@@ -33942,7 +33579,7 @@
           <a:lstStyle/>
           <a:p>
             <a:r>
-              <a:rPr lang="ko-KR" altLang="en-US" smtClean="0"/>
+              <a:rPr lang="ko-KR" altLang="en-US"/>
               <a:t>트러블 슈팅</a:t>
             </a:r>
             <a:endParaRPr lang="ko-KR" altLang="en-US" dirty="0"/>
@@ -33965,7 +33602,7 @@
           <a:lstStyle/>
           <a:p>
             <a:r>
-              <a:rPr lang="ko-KR" altLang="en-US" smtClean="0"/>
+              <a:rPr lang="ko-KR" altLang="en-US"/>
               <a:t>서서울</a:t>
             </a:r>
             <a:endParaRPr lang="ko-KR" altLang="en-US" dirty="0"/>
@@ -34002,6 +33639,13 @@
           </p:nvPr>
         </p:nvSpPr>
         <p:spPr/>
+        <p:txBody>
+          <a:bodyPr/>
+          <a:lstStyle/>
+          <a:p>
+            <a:endParaRPr lang="ko-KR" altLang="en-US"/>
+          </a:p>
+        </p:txBody>
       </p:sp>
       <p:sp>
         <p:nvSpPr>
@@ -34032,13 +33676,6 @@
   <p:clrMapOvr>
     <a:masterClrMapping/>
   </p:clrMapOvr>
-  <p:timing>
-    <p:tnLst>
-      <p:par>
-        <p:cTn id="1" dur="indefinite" restart="never" nodeType="tmRoot"/>
-      </p:par>
-    </p:tnLst>
-  </p:timing>
 </p:sld>
 </file>
 
@@ -34075,7 +33712,7 @@
           <a:lstStyle/>
           <a:p>
             <a:r>
-              <a:rPr lang="ko-KR" altLang="en-US" smtClean="0"/>
+              <a:rPr lang="ko-KR" altLang="en-US"/>
               <a:t> </a:t>
             </a:r>
             <a:endParaRPr lang="ko-KR" altLang="en-US" dirty="0"/>
@@ -34098,7 +33735,7 @@
           <a:lstStyle/>
           <a:p>
             <a:r>
-              <a:rPr lang="ko-KR" altLang="en-US" smtClean="0"/>
+              <a:rPr lang="ko-KR" altLang="en-US"/>
               <a:t>윤철민</a:t>
             </a:r>
             <a:endParaRPr lang="ko-KR" altLang="en-US" dirty="0"/>
@@ -34121,26 +33758,26 @@
           <a:lstStyle/>
           <a:p>
             <a:r>
-              <a:rPr lang="en-US" altLang="ko-KR" smtClean="0"/>
+              <a:rPr lang="en-US" altLang="ko-KR"/>
               <a:t>PL</a:t>
             </a:r>
           </a:p>
           <a:p>
             <a:r>
-              <a:rPr lang="ko-KR" altLang="en-US" smtClean="0"/>
+              <a:rPr lang="ko-KR" altLang="en-US"/>
               <a:t>담당업무 </a:t>
             </a:r>
             <a:r>
-              <a:rPr lang="en-US" altLang="ko-KR" smtClean="0"/>
+              <a:rPr lang="en-US" altLang="ko-KR"/>
               <a:t>3</a:t>
             </a:r>
           </a:p>
           <a:p>
             <a:r>
-              <a:rPr lang="ko-KR" altLang="en-US" smtClean="0"/>
+              <a:rPr lang="ko-KR" altLang="en-US"/>
               <a:t>트러블 슈팅</a:t>
             </a:r>
-            <a:endParaRPr lang="en-US" altLang="ko-KR" smtClean="0"/>
+            <a:endParaRPr lang="en-US" altLang="ko-KR"/>
           </a:p>
           <a:p>
             <a:endParaRPr lang="ko-KR" altLang="en-US" dirty="0"/>
@@ -34157,13 +33794,6 @@
   <p:clrMapOvr>
     <a:masterClrMapping/>
   </p:clrMapOvr>
-  <p:timing>
-    <p:tnLst>
-      <p:par>
-        <p:cTn id="1" dur="indefinite" restart="never" nodeType="tmRoot"/>
-      </p:par>
-    </p:tnLst>
-  </p:timing>
 </p:sld>
 </file>
 
@@ -34200,11 +33830,11 @@
           <a:lstStyle/>
           <a:p>
             <a:r>
-              <a:rPr lang="ko-KR" altLang="en-US" smtClean="0"/>
+              <a:rPr lang="ko-KR" altLang="en-US"/>
               <a:t>담당업무 </a:t>
             </a:r>
             <a:r>
-              <a:rPr lang="en-US" altLang="ko-KR" smtClean="0"/>
+              <a:rPr lang="en-US" altLang="ko-KR"/>
               <a:t>1</a:t>
             </a:r>
             <a:endParaRPr lang="en-US" altLang="ko-KR" dirty="0"/>
@@ -34227,7 +33857,7 @@
           <a:lstStyle/>
           <a:p>
             <a:r>
-              <a:rPr lang="ko-KR" altLang="en-US" smtClean="0"/>
+              <a:rPr lang="ko-KR" altLang="en-US"/>
               <a:t>윤철민</a:t>
             </a:r>
             <a:endParaRPr lang="ko-KR" altLang="en-US" dirty="0"/>
@@ -34264,6 +33894,13 @@
           </p:nvPr>
         </p:nvSpPr>
         <p:spPr/>
+        <p:txBody>
+          <a:bodyPr/>
+          <a:lstStyle/>
+          <a:p>
+            <a:endParaRPr lang="ko-KR" altLang="en-US"/>
+          </a:p>
+        </p:txBody>
       </p:sp>
       <p:sp>
         <p:nvSpPr>
@@ -34294,13 +33931,6 @@
   <p:clrMapOvr>
     <a:masterClrMapping/>
   </p:clrMapOvr>
-  <p:timing>
-    <p:tnLst>
-      <p:par>
-        <p:cTn id="1" dur="indefinite" restart="never" nodeType="tmRoot"/>
-      </p:par>
-    </p:tnLst>
-  </p:timing>
 </p:sld>
 </file>
 
@@ -34337,11 +33967,11 @@
           <a:lstStyle/>
           <a:p>
             <a:r>
-              <a:rPr lang="ko-KR" altLang="en-US" smtClean="0"/>
+              <a:rPr lang="ko-KR" altLang="en-US"/>
               <a:t>담당업무 </a:t>
             </a:r>
             <a:r>
-              <a:rPr lang="en-US" altLang="ko-KR" smtClean="0"/>
+              <a:rPr lang="en-US" altLang="ko-KR"/>
               <a:t>2</a:t>
             </a:r>
             <a:endParaRPr lang="en-US" altLang="ko-KR" dirty="0"/>
@@ -34364,7 +33994,7 @@
           <a:lstStyle/>
           <a:p>
             <a:r>
-              <a:rPr lang="ko-KR" altLang="en-US" smtClean="0"/>
+              <a:rPr lang="ko-KR" altLang="en-US"/>
               <a:t>윤철민</a:t>
             </a:r>
             <a:endParaRPr lang="ko-KR" altLang="en-US" dirty="0"/>
@@ -34401,6 +34031,13 @@
           </p:nvPr>
         </p:nvSpPr>
         <p:spPr/>
+        <p:txBody>
+          <a:bodyPr/>
+          <a:lstStyle/>
+          <a:p>
+            <a:endParaRPr lang="ko-KR" altLang="en-US"/>
+          </a:p>
+        </p:txBody>
       </p:sp>
       <p:sp>
         <p:nvSpPr>
@@ -34431,13 +34068,6 @@
   <p:clrMapOvr>
     <a:masterClrMapping/>
   </p:clrMapOvr>
-  <p:timing>
-    <p:tnLst>
-      <p:par>
-        <p:cTn id="1" dur="indefinite" restart="never" nodeType="tmRoot"/>
-      </p:par>
-    </p:tnLst>
-  </p:timing>
 </p:sld>
 </file>
 
@@ -34474,7 +34104,7 @@
           <a:lstStyle/>
           <a:p>
             <a:r>
-              <a:rPr lang="ko-KR" altLang="en-US" smtClean="0"/>
+              <a:rPr lang="ko-KR" altLang="en-US"/>
               <a:t>트러블 슈팅</a:t>
             </a:r>
             <a:endParaRPr lang="ko-KR" altLang="en-US" dirty="0"/>
@@ -34497,7 +34127,7 @@
           <a:lstStyle/>
           <a:p>
             <a:r>
-              <a:rPr lang="ko-KR" altLang="en-US" smtClean="0"/>
+              <a:rPr lang="ko-KR" altLang="en-US"/>
               <a:t>윤철민</a:t>
             </a:r>
             <a:endParaRPr lang="ko-KR" altLang="en-US" dirty="0"/>
@@ -34534,6 +34164,13 @@
           </p:nvPr>
         </p:nvSpPr>
         <p:spPr/>
+        <p:txBody>
+          <a:bodyPr/>
+          <a:lstStyle/>
+          <a:p>
+            <a:endParaRPr lang="ko-KR" altLang="en-US"/>
+          </a:p>
+        </p:txBody>
       </p:sp>
       <p:sp>
         <p:nvSpPr>
@@ -34564,13 +34201,6 @@
   <p:clrMapOvr>
     <a:masterClrMapping/>
   </p:clrMapOvr>
-  <p:timing>
-    <p:tnLst>
-      <p:par>
-        <p:cTn id="1" dur="indefinite" restart="never" nodeType="tmRoot"/>
-      </p:par>
-    </p:tnLst>
-  </p:timing>
 </p:sld>
 </file>
 
@@ -34607,7 +34237,7 @@
           <a:lstStyle/>
           <a:p>
             <a:r>
-              <a:rPr lang="ko-KR" altLang="en-US" smtClean="0"/>
+              <a:rPr lang="ko-KR" altLang="en-US"/>
               <a:t> </a:t>
             </a:r>
             <a:endParaRPr lang="ko-KR" altLang="en-US" dirty="0"/>
@@ -34630,7 +34260,7 @@
           <a:lstStyle/>
           <a:p>
             <a:r>
-              <a:rPr lang="ko-KR" altLang="en-US" smtClean="0"/>
+              <a:rPr lang="ko-KR" altLang="en-US"/>
               <a:t>오명근</a:t>
             </a:r>
             <a:endParaRPr lang="ko-KR" altLang="en-US" dirty="0"/>
@@ -34653,40 +34283,40 @@
           <a:lstStyle/>
           <a:p>
             <a:r>
-              <a:rPr lang="ko-KR" altLang="en-US" smtClean="0"/>
+              <a:rPr lang="ko-KR" altLang="en-US"/>
               <a:t>담당업무 </a:t>
             </a:r>
             <a:r>
-              <a:rPr lang="en-US" altLang="ko-KR" smtClean="0"/>
+              <a:rPr lang="en-US" altLang="ko-KR"/>
               <a:t>1</a:t>
             </a:r>
           </a:p>
           <a:p>
             <a:r>
-              <a:rPr lang="ko-KR" altLang="en-US" smtClean="0"/>
+              <a:rPr lang="ko-KR" altLang="en-US"/>
               <a:t>담당없무 </a:t>
             </a:r>
             <a:r>
-              <a:rPr lang="en-US" altLang="ko-KR" smtClean="0"/>
+              <a:rPr lang="en-US" altLang="ko-KR"/>
               <a:t>2</a:t>
             </a:r>
           </a:p>
           <a:p>
             <a:r>
-              <a:rPr lang="ko-KR" altLang="en-US" smtClean="0"/>
+              <a:rPr lang="ko-KR" altLang="en-US"/>
               <a:t>담당업무 </a:t>
             </a:r>
             <a:r>
-              <a:rPr lang="en-US" altLang="ko-KR" smtClean="0"/>
+              <a:rPr lang="en-US" altLang="ko-KR"/>
               <a:t>3</a:t>
             </a:r>
           </a:p>
           <a:p>
             <a:r>
-              <a:rPr lang="ko-KR" altLang="en-US" smtClean="0"/>
+              <a:rPr lang="ko-KR" altLang="en-US"/>
               <a:t>트러블 슈팅</a:t>
             </a:r>
-            <a:endParaRPr lang="en-US" altLang="ko-KR" smtClean="0"/>
+            <a:endParaRPr lang="en-US" altLang="ko-KR"/>
           </a:p>
           <a:p>
             <a:endParaRPr lang="ko-KR" altLang="en-US" dirty="0"/>
@@ -34703,13 +34333,6 @@
   <p:clrMapOvr>
     <a:masterClrMapping/>
   </p:clrMapOvr>
-  <p:timing>
-    <p:tnLst>
-      <p:par>
-        <p:cTn id="1" dur="indefinite" restart="never" nodeType="tmRoot"/>
-      </p:par>
-    </p:tnLst>
-  </p:timing>
 </p:sld>
 </file>
 
@@ -34746,11 +34369,11 @@
           <a:lstStyle/>
           <a:p>
             <a:r>
-              <a:rPr lang="ko-KR" altLang="en-US" smtClean="0"/>
+              <a:rPr lang="ko-KR" altLang="en-US"/>
               <a:t>담당업무 </a:t>
             </a:r>
             <a:r>
-              <a:rPr lang="en-US" altLang="ko-KR" smtClean="0"/>
+              <a:rPr lang="en-US" altLang="ko-KR"/>
               <a:t>1</a:t>
             </a:r>
             <a:endParaRPr lang="en-US" altLang="ko-KR" dirty="0"/>
@@ -34773,7 +34396,7 @@
           <a:lstStyle/>
           <a:p>
             <a:r>
-              <a:rPr lang="ko-KR" altLang="en-US" smtClean="0"/>
+              <a:rPr lang="ko-KR" altLang="en-US"/>
               <a:t>오명근</a:t>
             </a:r>
             <a:endParaRPr lang="ko-KR" altLang="en-US" dirty="0"/>
@@ -34810,6 +34433,13 @@
           </p:nvPr>
         </p:nvSpPr>
         <p:spPr/>
+        <p:txBody>
+          <a:bodyPr/>
+          <a:lstStyle/>
+          <a:p>
+            <a:endParaRPr lang="ko-KR" altLang="en-US"/>
+          </a:p>
+        </p:txBody>
       </p:sp>
       <p:sp>
         <p:nvSpPr>
@@ -34840,13 +34470,6 @@
   <p:clrMapOvr>
     <a:masterClrMapping/>
   </p:clrMapOvr>
-  <p:timing>
-    <p:tnLst>
-      <p:par>
-        <p:cTn id="1" dur="indefinite" restart="never" nodeType="tmRoot"/>
-      </p:par>
-    </p:tnLst>
-  </p:timing>
 </p:sld>
 </file>
 
@@ -34883,11 +34506,11 @@
           <a:lstStyle/>
           <a:p>
             <a:r>
-              <a:rPr lang="ko-KR" altLang="en-US" smtClean="0"/>
+              <a:rPr lang="ko-KR" altLang="en-US"/>
               <a:t>담당업무 </a:t>
             </a:r>
             <a:r>
-              <a:rPr lang="en-US" altLang="ko-KR" smtClean="0"/>
+              <a:rPr lang="en-US" altLang="ko-KR"/>
               <a:t>2</a:t>
             </a:r>
             <a:endParaRPr lang="en-US" altLang="ko-KR" dirty="0"/>
@@ -34910,7 +34533,7 @@
           <a:lstStyle/>
           <a:p>
             <a:r>
-              <a:rPr lang="ko-KR" altLang="en-US" smtClean="0"/>
+              <a:rPr lang="ko-KR" altLang="en-US"/>
               <a:t>오명근</a:t>
             </a:r>
             <a:endParaRPr lang="ko-KR" altLang="en-US" dirty="0"/>
@@ -34947,6 +34570,13 @@
           </p:nvPr>
         </p:nvSpPr>
         <p:spPr/>
+        <p:txBody>
+          <a:bodyPr/>
+          <a:lstStyle/>
+          <a:p>
+            <a:endParaRPr lang="ko-KR" altLang="en-US"/>
+          </a:p>
+        </p:txBody>
       </p:sp>
       <p:sp>
         <p:nvSpPr>
@@ -34977,13 +34607,6 @@
   <p:clrMapOvr>
     <a:masterClrMapping/>
   </p:clrMapOvr>
-  <p:timing>
-    <p:tnLst>
-      <p:par>
-        <p:cTn id="1" dur="indefinite" restart="never" nodeType="tmRoot"/>
-      </p:par>
-    </p:tnLst>
-  </p:timing>
 </p:sld>
 </file>
 
@@ -35020,7 +34643,7 @@
           <a:lstStyle/>
           <a:p>
             <a:r>
-              <a:rPr lang="ko-KR" altLang="en-US" smtClean="0"/>
+              <a:rPr lang="ko-KR" altLang="en-US"/>
               <a:t>트러블 슈팅</a:t>
             </a:r>
             <a:endParaRPr lang="ko-KR" altLang="en-US" dirty="0"/>
@@ -35043,7 +34666,7 @@
           <a:lstStyle/>
           <a:p>
             <a:r>
-              <a:rPr lang="ko-KR" altLang="en-US" smtClean="0"/>
+              <a:rPr lang="ko-KR" altLang="en-US"/>
               <a:t>오명근</a:t>
             </a:r>
             <a:endParaRPr lang="ko-KR" altLang="en-US" dirty="0"/>
@@ -35080,6 +34703,13 @@
           </p:nvPr>
         </p:nvSpPr>
         <p:spPr/>
+        <p:txBody>
+          <a:bodyPr/>
+          <a:lstStyle/>
+          <a:p>
+            <a:endParaRPr lang="ko-KR" altLang="en-US"/>
+          </a:p>
+        </p:txBody>
       </p:sp>
       <p:sp>
         <p:nvSpPr>
@@ -35110,13 +34740,6 @@
   <p:clrMapOvr>
     <a:masterClrMapping/>
   </p:clrMapOvr>
-  <p:timing>
-    <p:tnLst>
-      <p:par>
-        <p:cTn id="1" dur="indefinite" restart="never" nodeType="tmRoot"/>
-      </p:par>
-    </p:tnLst>
-  </p:timing>
 </p:sld>
 </file>
 
@@ -35153,7 +34776,7 @@
           <a:lstStyle/>
           <a:p>
             <a:r>
-              <a:rPr lang="ko-KR" altLang="en-US" smtClean="0"/>
+              <a:rPr lang="ko-KR" altLang="en-US"/>
               <a:t> </a:t>
             </a:r>
             <a:endParaRPr lang="ko-KR" altLang="en-US" dirty="0"/>
@@ -35176,7 +34799,7 @@
           <a:lstStyle/>
           <a:p>
             <a:r>
-              <a:rPr lang="ko-KR" altLang="en-US" smtClean="0"/>
+              <a:rPr lang="ko-KR" altLang="en-US"/>
               <a:t>서정원</a:t>
             </a:r>
             <a:endParaRPr lang="ko-KR" altLang="en-US" dirty="0"/>
@@ -35199,40 +34822,40 @@
           <a:lstStyle/>
           <a:p>
             <a:r>
-              <a:rPr lang="ko-KR" altLang="en-US" smtClean="0"/>
+              <a:rPr lang="ko-KR" altLang="en-US"/>
               <a:t>담당업무 </a:t>
             </a:r>
             <a:r>
-              <a:rPr lang="en-US" altLang="ko-KR" smtClean="0"/>
+              <a:rPr lang="en-US" altLang="ko-KR"/>
               <a:t>1</a:t>
             </a:r>
           </a:p>
           <a:p>
             <a:r>
-              <a:rPr lang="ko-KR" altLang="en-US" smtClean="0"/>
+              <a:rPr lang="ko-KR" altLang="en-US"/>
               <a:t>담당없무 </a:t>
             </a:r>
             <a:r>
-              <a:rPr lang="en-US" altLang="ko-KR" smtClean="0"/>
+              <a:rPr lang="en-US" altLang="ko-KR"/>
               <a:t>2</a:t>
             </a:r>
           </a:p>
           <a:p>
             <a:r>
-              <a:rPr lang="ko-KR" altLang="en-US" smtClean="0"/>
+              <a:rPr lang="ko-KR" altLang="en-US"/>
               <a:t>담당업무 </a:t>
             </a:r>
             <a:r>
-              <a:rPr lang="en-US" altLang="ko-KR" smtClean="0"/>
+              <a:rPr lang="en-US" altLang="ko-KR"/>
               <a:t>3</a:t>
             </a:r>
           </a:p>
           <a:p>
             <a:r>
-              <a:rPr lang="ko-KR" altLang="en-US" smtClean="0"/>
+              <a:rPr lang="ko-KR" altLang="en-US"/>
               <a:t>트러블 슈팅</a:t>
             </a:r>
-            <a:endParaRPr lang="en-US" altLang="ko-KR" smtClean="0"/>
+            <a:endParaRPr lang="en-US" altLang="ko-KR"/>
           </a:p>
           <a:p>
             <a:endParaRPr lang="ko-KR" altLang="en-US" dirty="0"/>
@@ -35249,13 +34872,6 @@
   <p:clrMapOvr>
     <a:masterClrMapping/>
   </p:clrMapOvr>
-  <p:timing>
-    <p:tnLst>
-      <p:par>
-        <p:cTn id="1" dur="indefinite" restart="never" nodeType="tmRoot"/>
-      </p:par>
-    </p:tnLst>
-  </p:timing>
 </p:sld>
 </file>
 
@@ -35286,13 +34902,6 @@
   <p:clrMapOvr>
     <a:masterClrMapping/>
   </p:clrMapOvr>
-  <p:timing>
-    <p:tnLst>
-      <p:par>
-        <p:cTn id="1" dur="indefinite" restart="never" nodeType="tmRoot"/>
-      </p:par>
-    </p:tnLst>
-  </p:timing>
 </p:sld>
 </file>
 
@@ -35329,11 +34938,11 @@
           <a:lstStyle/>
           <a:p>
             <a:r>
-              <a:rPr lang="ko-KR" altLang="en-US" smtClean="0"/>
+              <a:rPr lang="ko-KR" altLang="en-US"/>
               <a:t>담당업무 </a:t>
             </a:r>
             <a:r>
-              <a:rPr lang="en-US" altLang="ko-KR" smtClean="0"/>
+              <a:rPr lang="en-US" altLang="ko-KR"/>
               <a:t>1</a:t>
             </a:r>
             <a:endParaRPr lang="en-US" altLang="ko-KR" dirty="0"/>
@@ -35356,7 +34965,7 @@
           <a:lstStyle/>
           <a:p>
             <a:r>
-              <a:rPr lang="ko-KR" altLang="en-US" smtClean="0"/>
+              <a:rPr lang="ko-KR" altLang="en-US"/>
               <a:t>서정원</a:t>
             </a:r>
             <a:endParaRPr lang="ko-KR" altLang="en-US" dirty="0"/>
@@ -35393,6 +35002,13 @@
           </p:nvPr>
         </p:nvSpPr>
         <p:spPr/>
+        <p:txBody>
+          <a:bodyPr/>
+          <a:lstStyle/>
+          <a:p>
+            <a:endParaRPr lang="ko-KR" altLang="en-US"/>
+          </a:p>
+        </p:txBody>
       </p:sp>
       <p:sp>
         <p:nvSpPr>
@@ -35423,13 +35039,6 @@
   <p:clrMapOvr>
     <a:masterClrMapping/>
   </p:clrMapOvr>
-  <p:timing>
-    <p:tnLst>
-      <p:par>
-        <p:cTn id="1" dur="indefinite" restart="never" nodeType="tmRoot"/>
-      </p:par>
-    </p:tnLst>
-  </p:timing>
 </p:sld>
 </file>
 
@@ -35466,11 +35075,11 @@
           <a:lstStyle/>
           <a:p>
             <a:r>
-              <a:rPr lang="ko-KR" altLang="en-US" smtClean="0"/>
+              <a:rPr lang="ko-KR" altLang="en-US"/>
               <a:t>담당업무 </a:t>
             </a:r>
             <a:r>
-              <a:rPr lang="en-US" altLang="ko-KR" smtClean="0"/>
+              <a:rPr lang="en-US" altLang="ko-KR"/>
               <a:t>2</a:t>
             </a:r>
             <a:endParaRPr lang="en-US" altLang="ko-KR" dirty="0"/>
@@ -35493,7 +35102,7 @@
           <a:lstStyle/>
           <a:p>
             <a:r>
-              <a:rPr lang="ko-KR" altLang="en-US" smtClean="0"/>
+              <a:rPr lang="ko-KR" altLang="en-US"/>
               <a:t>서정원</a:t>
             </a:r>
             <a:endParaRPr lang="ko-KR" altLang="en-US" dirty="0"/>
@@ -35530,6 +35139,13 @@
           </p:nvPr>
         </p:nvSpPr>
         <p:spPr/>
+        <p:txBody>
+          <a:bodyPr/>
+          <a:lstStyle/>
+          <a:p>
+            <a:endParaRPr lang="ko-KR" altLang="en-US"/>
+          </a:p>
+        </p:txBody>
       </p:sp>
       <p:sp>
         <p:nvSpPr>
@@ -35560,13 +35176,6 @@
   <p:clrMapOvr>
     <a:masterClrMapping/>
   </p:clrMapOvr>
-  <p:timing>
-    <p:tnLst>
-      <p:par>
-        <p:cTn id="1" dur="indefinite" restart="never" nodeType="tmRoot"/>
-      </p:par>
-    </p:tnLst>
-  </p:timing>
 </p:sld>
 </file>
 
@@ -35603,7 +35212,7 @@
           <a:lstStyle/>
           <a:p>
             <a:r>
-              <a:rPr lang="ko-KR" altLang="en-US" smtClean="0"/>
+              <a:rPr lang="ko-KR" altLang="en-US"/>
               <a:t>트러블 슈팅</a:t>
             </a:r>
             <a:endParaRPr lang="ko-KR" altLang="en-US" dirty="0"/>
@@ -35626,7 +35235,7 @@
           <a:lstStyle/>
           <a:p>
             <a:r>
-              <a:rPr lang="ko-KR" altLang="en-US" smtClean="0"/>
+              <a:rPr lang="ko-KR" altLang="en-US"/>
               <a:t>서정원</a:t>
             </a:r>
             <a:endParaRPr lang="ko-KR" altLang="en-US" dirty="0"/>
@@ -35663,6 +35272,13 @@
           </p:nvPr>
         </p:nvSpPr>
         <p:spPr/>
+        <p:txBody>
+          <a:bodyPr/>
+          <a:lstStyle/>
+          <a:p>
+            <a:endParaRPr lang="ko-KR" altLang="en-US"/>
+          </a:p>
+        </p:txBody>
       </p:sp>
       <p:sp>
         <p:nvSpPr>
@@ -35693,13 +35309,6 @@
   <p:clrMapOvr>
     <a:masterClrMapping/>
   </p:clrMapOvr>
-  <p:timing>
-    <p:tnLst>
-      <p:par>
-        <p:cTn id="1" dur="indefinite" restart="never" nodeType="tmRoot"/>
-      </p:par>
-    </p:tnLst>
-  </p:timing>
 </p:sld>
 </file>
 
@@ -35736,7 +35345,7 @@
           <a:lstStyle/>
           <a:p>
             <a:r>
-              <a:rPr lang="ko-KR" altLang="en-US" smtClean="0"/>
+              <a:rPr lang="ko-KR" altLang="en-US"/>
               <a:t> </a:t>
             </a:r>
           </a:p>
@@ -35761,7 +35370,7 @@
           <a:lstStyle/>
           <a:p>
             <a:r>
-              <a:rPr lang="ko-KR" altLang="en-US" smtClean="0"/>
+              <a:rPr lang="ko-KR" altLang="en-US"/>
               <a:t>이주환</a:t>
             </a:r>
             <a:endParaRPr lang="ko-KR" altLang="en-US" dirty="0"/>
@@ -35784,40 +35393,40 @@
           <a:lstStyle/>
           <a:p>
             <a:r>
-              <a:rPr lang="ko-KR" altLang="en-US" smtClean="0"/>
+              <a:rPr lang="ko-KR" altLang="en-US"/>
               <a:t>담당업무 </a:t>
             </a:r>
             <a:r>
-              <a:rPr lang="en-US" altLang="ko-KR" smtClean="0"/>
+              <a:rPr lang="en-US" altLang="ko-KR"/>
               <a:t>1</a:t>
             </a:r>
           </a:p>
           <a:p>
             <a:r>
-              <a:rPr lang="ko-KR" altLang="en-US" smtClean="0"/>
+              <a:rPr lang="ko-KR" altLang="en-US"/>
               <a:t>담당없무 </a:t>
             </a:r>
             <a:r>
-              <a:rPr lang="en-US" altLang="ko-KR" smtClean="0"/>
+              <a:rPr lang="en-US" altLang="ko-KR"/>
               <a:t>2</a:t>
             </a:r>
           </a:p>
           <a:p>
             <a:r>
-              <a:rPr lang="ko-KR" altLang="en-US" smtClean="0"/>
+              <a:rPr lang="ko-KR" altLang="en-US"/>
               <a:t>담당업무 </a:t>
             </a:r>
             <a:r>
-              <a:rPr lang="en-US" altLang="ko-KR" smtClean="0"/>
+              <a:rPr lang="en-US" altLang="ko-KR"/>
               <a:t>3</a:t>
             </a:r>
           </a:p>
           <a:p>
             <a:r>
-              <a:rPr lang="ko-KR" altLang="en-US" smtClean="0"/>
+              <a:rPr lang="ko-KR" altLang="en-US"/>
               <a:t>트러블 슈팅</a:t>
             </a:r>
-            <a:endParaRPr lang="en-US" altLang="ko-KR" smtClean="0"/>
+            <a:endParaRPr lang="en-US" altLang="ko-KR"/>
           </a:p>
           <a:p>
             <a:endParaRPr lang="ko-KR" altLang="en-US" dirty="0"/>
@@ -35834,13 +35443,6 @@
   <p:clrMapOvr>
     <a:masterClrMapping/>
   </p:clrMapOvr>
-  <p:timing>
-    <p:tnLst>
-      <p:par>
-        <p:cTn id="1" dur="indefinite" restart="never" nodeType="tmRoot"/>
-      </p:par>
-    </p:tnLst>
-  </p:timing>
 </p:sld>
 </file>
 
@@ -35877,11 +35479,11 @@
           <a:lstStyle/>
           <a:p>
             <a:r>
-              <a:rPr lang="ko-KR" altLang="en-US" smtClean="0"/>
+              <a:rPr lang="ko-KR" altLang="en-US"/>
               <a:t>담당업무 </a:t>
             </a:r>
             <a:r>
-              <a:rPr lang="en-US" altLang="ko-KR" smtClean="0"/>
+              <a:rPr lang="en-US" altLang="ko-KR"/>
               <a:t>1</a:t>
             </a:r>
             <a:endParaRPr lang="en-US" altLang="ko-KR" dirty="0"/>
@@ -35904,7 +35506,7 @@
           <a:lstStyle/>
           <a:p>
             <a:r>
-              <a:rPr lang="ko-KR" altLang="en-US" smtClean="0"/>
+              <a:rPr lang="ko-KR" altLang="en-US"/>
               <a:t>이주환</a:t>
             </a:r>
             <a:endParaRPr lang="ko-KR" altLang="en-US" dirty="0"/>
@@ -35941,6 +35543,13 @@
           </p:nvPr>
         </p:nvSpPr>
         <p:spPr/>
+        <p:txBody>
+          <a:bodyPr/>
+          <a:lstStyle/>
+          <a:p>
+            <a:endParaRPr lang="ko-KR" altLang="en-US"/>
+          </a:p>
+        </p:txBody>
       </p:sp>
       <p:sp>
         <p:nvSpPr>
@@ -35971,13 +35580,6 @@
   <p:clrMapOvr>
     <a:masterClrMapping/>
   </p:clrMapOvr>
-  <p:timing>
-    <p:tnLst>
-      <p:par>
-        <p:cTn id="1" dur="indefinite" restart="never" nodeType="tmRoot"/>
-      </p:par>
-    </p:tnLst>
-  </p:timing>
 </p:sld>
 </file>
 
@@ -36014,11 +35616,11 @@
           <a:lstStyle/>
           <a:p>
             <a:r>
-              <a:rPr lang="ko-KR" altLang="en-US" smtClean="0"/>
+              <a:rPr lang="ko-KR" altLang="en-US"/>
               <a:t>담당업무 </a:t>
             </a:r>
             <a:r>
-              <a:rPr lang="en-US" altLang="ko-KR" smtClean="0"/>
+              <a:rPr lang="en-US" altLang="ko-KR"/>
               <a:t>2</a:t>
             </a:r>
             <a:endParaRPr lang="en-US" altLang="ko-KR" dirty="0"/>
@@ -36041,7 +35643,7 @@
           <a:lstStyle/>
           <a:p>
             <a:r>
-              <a:rPr lang="ko-KR" altLang="en-US" smtClean="0"/>
+              <a:rPr lang="ko-KR" altLang="en-US"/>
               <a:t>이주환</a:t>
             </a:r>
             <a:endParaRPr lang="ko-KR" altLang="en-US" dirty="0"/>
@@ -36078,6 +35680,13 @@
           </p:nvPr>
         </p:nvSpPr>
         <p:spPr/>
+        <p:txBody>
+          <a:bodyPr/>
+          <a:lstStyle/>
+          <a:p>
+            <a:endParaRPr lang="ko-KR" altLang="en-US"/>
+          </a:p>
+        </p:txBody>
       </p:sp>
       <p:sp>
         <p:nvSpPr>
@@ -36108,13 +35717,6 @@
   <p:clrMapOvr>
     <a:masterClrMapping/>
   </p:clrMapOvr>
-  <p:timing>
-    <p:tnLst>
-      <p:par>
-        <p:cTn id="1" dur="indefinite" restart="never" nodeType="tmRoot"/>
-      </p:par>
-    </p:tnLst>
-  </p:timing>
 </p:sld>
 </file>
 
@@ -36151,7 +35753,7 @@
           <a:lstStyle/>
           <a:p>
             <a:r>
-              <a:rPr lang="ko-KR" altLang="en-US" smtClean="0"/>
+              <a:rPr lang="ko-KR" altLang="en-US"/>
               <a:t>트러블 슈팅</a:t>
             </a:r>
             <a:endParaRPr lang="ko-KR" altLang="en-US" dirty="0"/>
@@ -36174,7 +35776,7 @@
           <a:lstStyle/>
           <a:p>
             <a:r>
-              <a:rPr lang="ko-KR" altLang="en-US" smtClean="0"/>
+              <a:rPr lang="ko-KR" altLang="en-US"/>
               <a:t>이주환</a:t>
             </a:r>
             <a:endParaRPr lang="ko-KR" altLang="en-US" dirty="0"/>
@@ -36211,6 +35813,13 @@
           </p:nvPr>
         </p:nvSpPr>
         <p:spPr/>
+        <p:txBody>
+          <a:bodyPr/>
+          <a:lstStyle/>
+          <a:p>
+            <a:endParaRPr lang="ko-KR" altLang="en-US"/>
+          </a:p>
+        </p:txBody>
       </p:sp>
       <p:sp>
         <p:nvSpPr>
@@ -36241,13 +35850,6 @@
   <p:clrMapOvr>
     <a:masterClrMapping/>
   </p:clrMapOvr>
-  <p:timing>
-    <p:tnLst>
-      <p:par>
-        <p:cTn id="1" dur="indefinite" restart="never" nodeType="tmRoot"/>
-      </p:par>
-    </p:tnLst>
-  </p:timing>
 </p:sld>
 </file>
 
@@ -36284,7 +35886,7 @@
           <a:lstStyle/>
           <a:p>
             <a:r>
-              <a:rPr lang="ko-KR" altLang="en-US" smtClean="0"/>
+              <a:rPr lang="ko-KR" altLang="en-US"/>
               <a:t>프로젝트 후 느낀 점</a:t>
             </a:r>
             <a:endParaRPr lang="ko-KR" altLang="en-US" dirty="0"/>
@@ -36307,11 +35909,11 @@
           <a:lstStyle/>
           <a:p>
             <a:r>
-              <a:rPr lang="ko-KR" altLang="en-US" smtClean="0"/>
+              <a:rPr lang="ko-KR" altLang="en-US"/>
               <a:t>서서울 </a:t>
             </a:r>
             <a:r>
-              <a:rPr lang="en-US" altLang="ko-KR" smtClean="0"/>
+              <a:rPr lang="en-US" altLang="ko-KR"/>
               <a:t>(PM)</a:t>
             </a:r>
             <a:endParaRPr lang="ko-KR" altLang="en-US" dirty="0"/>
@@ -36334,11 +35936,11 @@
           <a:lstStyle/>
           <a:p>
             <a:r>
-              <a:rPr lang="ko-KR" altLang="en-US" smtClean="0"/>
+              <a:rPr lang="ko-KR" altLang="en-US"/>
               <a:t>윤철민 </a:t>
             </a:r>
             <a:r>
-              <a:rPr lang="en-US" altLang="ko-KR" smtClean="0"/>
+              <a:rPr lang="en-US" altLang="ko-KR"/>
               <a:t>(PL)</a:t>
             </a:r>
             <a:endParaRPr lang="ko-KR" altLang="en-US" dirty="0"/>
@@ -36361,7 +35963,7 @@
           <a:lstStyle/>
           <a:p>
             <a:r>
-              <a:rPr lang="ko-KR" altLang="en-US" smtClean="0"/>
+              <a:rPr lang="ko-KR" altLang="en-US"/>
               <a:t>오명근</a:t>
             </a:r>
             <a:endParaRPr lang="ko-KR" altLang="en-US" dirty="0"/>
@@ -36384,7 +35986,7 @@
           <a:lstStyle/>
           <a:p>
             <a:r>
-              <a:rPr lang="ko-KR" altLang="en-US" smtClean="0"/>
+              <a:rPr lang="ko-KR" altLang="en-US"/>
               <a:t>서정원</a:t>
             </a:r>
             <a:endParaRPr lang="ko-KR" altLang="en-US" dirty="0"/>
@@ -36407,7 +36009,7 @@
           <a:lstStyle/>
           <a:p>
             <a:r>
-              <a:rPr lang="ko-KR" altLang="en-US" smtClean="0"/>
+              <a:rPr lang="ko-KR" altLang="en-US"/>
               <a:t>이주환</a:t>
             </a:r>
             <a:endParaRPr lang="ko-KR" altLang="en-US" dirty="0"/>
@@ -36869,13 +36471,6 @@
   <p:clrMapOvr>
     <a:masterClrMapping/>
   </p:clrMapOvr>
-  <p:timing>
-    <p:tnLst>
-      <p:par>
-        <p:cTn id="1" dur="indefinite" restart="never" nodeType="tmRoot"/>
-      </p:par>
-    </p:tnLst>
-  </p:timing>
 </p:sld>
 </file>
 
@@ -36906,13 +36501,6 @@
   <p:clrMapOvr>
     <a:masterClrMapping/>
   </p:clrMapOvr>
-  <p:timing>
-    <p:tnLst>
-      <p:par>
-        <p:cTn id="1" dur="indefinite" restart="never" nodeType="tmRoot"/>
-      </p:par>
-    </p:tnLst>
-  </p:timing>
 </p:sld>
 </file>
 
@@ -36944,6 +36532,13 @@
           </p:nvPr>
         </p:nvSpPr>
         <p:spPr/>
+        <p:txBody>
+          <a:bodyPr/>
+          <a:lstStyle/>
+          <a:p>
+            <a:endParaRPr lang="ko-KR" altLang="en-US"/>
+          </a:p>
+        </p:txBody>
       </p:sp>
       <p:sp>
         <p:nvSpPr>
@@ -36974,13 +36569,6 @@
   <p:clrMapOvr>
     <a:masterClrMapping/>
   </p:clrMapOvr>
-  <p:timing>
-    <p:tnLst>
-      <p:par>
-        <p:cTn id="1" dur="indefinite" restart="never" nodeType="tmRoot"/>
-      </p:par>
-    </p:tnLst>
-  </p:timing>
 </p:sld>
 </file>
 
@@ -37017,10 +36605,9 @@
           <a:lstStyle/>
           <a:p>
             <a:r>
-              <a:rPr lang="ko-KR" altLang="en-US" dirty="0" smtClean="0"/>
+              <a:rPr lang="ko-KR" altLang="en-US" dirty="0"/>
               <a:t>추진 배경</a:t>
             </a:r>
-            <a:endParaRPr lang="ko-KR" altLang="en-US" dirty="0"/>
           </a:p>
         </p:txBody>
       </p:sp>
@@ -37611,13 +37198,6 @@
   <p:clrMapOvr>
     <a:masterClrMapping/>
   </p:clrMapOvr>
-  <p:timing>
-    <p:tnLst>
-      <p:par>
-        <p:cTn id="1" dur="indefinite" restart="never" nodeType="tmRoot"/>
-      </p:par>
-    </p:tnLst>
-  </p:timing>
 </p:sld>
 </file>
 
@@ -37648,13 +37228,6 @@
   <p:clrMapOvr>
     <a:masterClrMapping/>
   </p:clrMapOvr>
-  <p:timing>
-    <p:tnLst>
-      <p:par>
-        <p:cTn id="1" dur="indefinite" restart="never" nodeType="tmRoot"/>
-      </p:par>
-    </p:tnLst>
-  </p:timing>
 </p:sld>
 </file>
 
@@ -37691,14 +37264,14 @@
           <a:lstStyle/>
           <a:p>
             <a:r>
-              <a:rPr lang="ko-KR" altLang="en-US" dirty="0" err="1" smtClean="0"/>
+              <a:rPr lang="ko-KR" altLang="en-US" dirty="0" err="1"/>
               <a:t>고객사</a:t>
             </a:r>
             <a:r>
-              <a:rPr lang="ko-KR" altLang="en-US" dirty="0" smtClean="0"/>
+              <a:rPr lang="ko-KR" altLang="en-US" dirty="0"/>
               <a:t> 설명</a:t>
             </a:r>
-            <a:endParaRPr lang="en-US" altLang="ko-KR" dirty="0" smtClean="0"/>
+            <a:endParaRPr lang="en-US" altLang="ko-KR" dirty="0"/>
           </a:p>
         </p:txBody>
       </p:sp>
@@ -37910,22 +37483,13 @@
               <a:defRPr/>
             </a:pPr>
             <a:r>
-              <a:rPr lang="ko-KR" altLang="en-US" sz="1500" b="1" dirty="0" err="1" smtClean="0">
-                <a:solidFill>
-                  <a:schemeClr val="tx1"/>
-                </a:solidFill>
-                <a:ea typeface="Noto Sans KR Black"/>
-              </a:rPr>
-              <a:t>DingDongDOG</a:t>
-            </a:r>
-            <a:r>
               <a:rPr lang="ko-KR" altLang="en-US" sz="1500" b="1" dirty="0" err="1">
                 <a:solidFill>
                   <a:schemeClr val="tx1"/>
                 </a:solidFill>
                 <a:ea typeface="Noto Sans KR Black"/>
               </a:rPr>
-              <a:t>!은</a:t>
+              <a:t>DingDongDOG!은</a:t>
             </a:r>
             <a:r>
               <a:rPr lang="ko-KR" altLang="en-US" sz="1500" b="1" dirty="0">
@@ -37935,12 +37499,6 @@
                 <a:ea typeface="Noto Sans KR Black"/>
               </a:rPr>
               <a:t> 단순한 유기견 정보 공유를 넘어,</a:t>
-            </a:r>
-            <a:r>
-              <a:rPr lang="ko-KR" altLang="en-US" sz="1500" b="1" dirty="0">
-                <a:ea typeface="Noto Sans KR Black"/>
-              </a:rPr>
-              <a:t/>
             </a:r>
             <a:br>
               <a:rPr lang="ko-KR" altLang="en-US" sz="1500" b="1" dirty="0">
@@ -38055,13 +37613,6 @@
   <p:clrMapOvr>
     <a:masterClrMapping/>
   </p:clrMapOvr>
-  <p:timing>
-    <p:tnLst>
-      <p:par>
-        <p:cTn id="1" dur="indefinite" restart="never" nodeType="tmRoot"/>
-      </p:par>
-    </p:tnLst>
-  </p:timing>
 </p:sld>
 </file>
 
@@ -38098,10 +37649,9 @@
           <a:lstStyle/>
           <a:p>
             <a:r>
-              <a:rPr lang="ko-KR" altLang="en-US" dirty="0" smtClean="0"/>
+              <a:rPr lang="ko-KR" altLang="en-US" dirty="0"/>
               <a:t>시나리오</a:t>
             </a:r>
-            <a:endParaRPr lang="ko-KR" altLang="en-US" dirty="0"/>
           </a:p>
         </p:txBody>
       </p:sp>
@@ -38153,18 +37703,6 @@
                 <a:sym typeface="Malgun Gothic"/>
               </a:rPr>
               <a:t>위협 증가</a:t>
-            </a:r>
-            <a:r>
-              <a:rPr lang="ko-KR" sz="1500" b="1" dirty="0">
-                <a:solidFill>
-                  <a:schemeClr val="lt1"/>
-                </a:solidFill>
-                <a:latin typeface="Noto Sans KR" panose="020B0600000101010101" charset="-127"/>
-                <a:ea typeface="Noto Sans KR" panose="020B0600000101010101" charset="-127"/>
-                <a:cs typeface="Malgun Gothic"/>
-                <a:sym typeface="Malgun Gothic"/>
-              </a:rPr>
-              <a:t/>
             </a:r>
             <a:br>
               <a:rPr lang="ko-KR" sz="1500" b="1" dirty="0">
@@ -38540,7 +38078,7 @@
               <a:buNone/>
             </a:pPr>
             <a:r>
-              <a:rPr lang="ko-KR" altLang="en-US" sz="1200" b="1" dirty="0" smtClean="0">
+              <a:rPr lang="ko-KR" altLang="en-US" sz="1200" b="1" dirty="0">
                 <a:solidFill>
                   <a:schemeClr val="dk1"/>
                 </a:solidFill>
@@ -38628,7 +38166,7 @@
               <a:buNone/>
             </a:pPr>
             <a:r>
-              <a:rPr lang="ko-KR" altLang="en-US" sz="1200" b="1" dirty="0" smtClean="0">
+              <a:rPr lang="ko-KR" altLang="en-US" sz="1200" b="1" dirty="0">
                 <a:solidFill>
                   <a:schemeClr val="dk1"/>
                 </a:solidFill>
@@ -38655,13 +38193,6 @@
   <p:clrMapOvr>
     <a:masterClrMapping/>
   </p:clrMapOvr>
-  <p:timing>
-    <p:tnLst>
-      <p:par>
-        <p:cTn id="1" dur="indefinite" restart="never" nodeType="tmRoot"/>
-      </p:par>
-    </p:tnLst>
-  </p:timing>
 </p:sld>
 </file>
 
@@ -38698,10 +38229,9 @@
           <a:lstStyle/>
           <a:p>
             <a:r>
-              <a:rPr lang="ko-KR" altLang="en-US" dirty="0" smtClean="0"/>
+              <a:rPr lang="ko-KR" altLang="en-US" dirty="0"/>
               <a:t>시나리오</a:t>
             </a:r>
-            <a:endParaRPr lang="ko-KR" altLang="en-US" dirty="0"/>
           </a:p>
         </p:txBody>
       </p:sp>
@@ -38807,18 +38337,6 @@
                 <a:sym typeface="Malgun Gothic"/>
               </a:rPr>
               <a:t>보안 사고</a:t>
-            </a:r>
-            <a:r>
-              <a:rPr lang="ko-KR" sz="1500" b="1" dirty="0">
-                <a:solidFill>
-                  <a:schemeClr val="lt1"/>
-                </a:solidFill>
-                <a:latin typeface="Noto Sans KR" panose="020B0600000101010101" charset="-127"/>
-                <a:ea typeface="Noto Sans KR" panose="020B0600000101010101" charset="-127"/>
-                <a:cs typeface="Malgun Gothic"/>
-                <a:sym typeface="Malgun Gothic"/>
-              </a:rPr>
-              <a:t/>
             </a:r>
             <a:br>
               <a:rPr lang="ko-KR" sz="1500" b="1" dirty="0">
@@ -39133,7 +38651,7 @@
               <a:buNone/>
             </a:pPr>
             <a:r>
-              <a:rPr lang="ko-KR" altLang="en-US" sz="1200" b="1" dirty="0" smtClean="0">
+              <a:rPr lang="ko-KR" altLang="en-US" sz="1200" b="1" dirty="0">
                 <a:solidFill>
                   <a:schemeClr val="dk1"/>
                 </a:solidFill>
@@ -39188,7 +38706,7 @@
               <a:buNone/>
             </a:pPr>
             <a:r>
-              <a:rPr lang="ko-KR" altLang="en-US" sz="1200" b="1" dirty="0" smtClean="0">
+              <a:rPr lang="ko-KR" altLang="en-US" sz="1200" b="1" dirty="0">
                 <a:solidFill>
                   <a:schemeClr val="dk1"/>
                 </a:solidFill>
@@ -39199,7 +38717,7 @@
               <a:t>데이터</a:t>
             </a:r>
             <a:r>
-              <a:rPr lang="ko-KR" altLang="en-US" sz="1400" b="1" dirty="0" smtClean="0">
+              <a:rPr lang="ko-KR" altLang="en-US" sz="1400" b="1" dirty="0">
                 <a:solidFill>
                   <a:schemeClr val="dk1"/>
                 </a:solidFill>
@@ -39226,13 +38744,6 @@
   <p:clrMapOvr>
     <a:masterClrMapping/>
   </p:clrMapOvr>
-  <p:timing>
-    <p:tnLst>
-      <p:par>
-        <p:cTn id="1" dur="indefinite" restart="never" nodeType="tmRoot"/>
-      </p:par>
-    </p:tnLst>
-  </p:timing>
 </p:sld>
 </file>
 
@@ -39269,10 +38780,9 @@
           <a:lstStyle/>
           <a:p>
             <a:r>
-              <a:rPr lang="ko-KR" altLang="en-US" dirty="0" smtClean="0"/>
+              <a:rPr lang="ko-KR" altLang="en-US" dirty="0"/>
               <a:t>시나리오</a:t>
             </a:r>
-            <a:endParaRPr lang="ko-KR" altLang="en-US" dirty="0"/>
           </a:p>
         </p:txBody>
       </p:sp>
@@ -39324,18 +38834,6 @@
                 <a:sym typeface="Malgun Gothic"/>
               </a:rPr>
               <a:t>통합 관제 부재</a:t>
-            </a:r>
-            <a:r>
-              <a:rPr lang="ko-KR" sz="1500" b="1" dirty="0">
-                <a:solidFill>
-                  <a:schemeClr val="lt1"/>
-                </a:solidFill>
-                <a:latin typeface="Noto Sans KR" panose="020B0600000101010101" charset="-127"/>
-                <a:ea typeface="Noto Sans KR" panose="020B0600000101010101" charset="-127"/>
-                <a:cs typeface="Malgun Gothic"/>
-                <a:sym typeface="Malgun Gothic"/>
-              </a:rPr>
-              <a:t/>
             </a:r>
             <a:br>
               <a:rPr lang="ko-KR" sz="1500" b="1" dirty="0">
@@ -39667,7 +39165,7 @@
               <a:buNone/>
             </a:pPr>
             <a:r>
-              <a:rPr lang="en-US" altLang="ko-KR" sz="1400" b="1" dirty="0" smtClean="0">
+              <a:rPr lang="en-US" altLang="ko-KR" sz="1400" b="1" dirty="0">
                 <a:solidFill>
                   <a:schemeClr val="dk1"/>
                 </a:solidFill>
@@ -39678,7 +39176,7 @@
               <a:t>SIEM </a:t>
             </a:r>
             <a:r>
-              <a:rPr lang="ko-KR" altLang="en-US" sz="1400" b="1" dirty="0" smtClean="0">
+              <a:rPr lang="ko-KR" altLang="en-US" sz="1400" b="1" dirty="0">
                 <a:solidFill>
                   <a:schemeClr val="dk1"/>
                 </a:solidFill>
@@ -39688,19 +39186,8 @@
               </a:rPr>
               <a:t>장비 </a:t>
             </a:r>
-            <a:r>
-              <a:rPr lang="en-US" altLang="ko-KR" sz="1400" b="1" dirty="0" smtClean="0">
-                <a:solidFill>
-                  <a:schemeClr val="dk1"/>
-                </a:solidFill>
-                <a:latin typeface="Noto Sans KR" panose="020B0600000101010101" charset="-127"/>
-                <a:ea typeface="Noto Sans KR" panose="020B0600000101010101" charset="-127"/>
-                <a:sym typeface="Malgun Gothic"/>
-              </a:rPr>
-              <a:t/>
-            </a:r>
             <a:br>
-              <a:rPr lang="en-US" altLang="ko-KR" sz="1400" b="1" dirty="0" smtClean="0">
+              <a:rPr lang="en-US" altLang="ko-KR" sz="1400" b="1" dirty="0">
                 <a:solidFill>
                   <a:schemeClr val="dk1"/>
                 </a:solidFill>
@@ -39710,7 +39197,7 @@
               </a:rPr>
             </a:br>
             <a:r>
-              <a:rPr lang="ko-KR" altLang="en-US" sz="1400" b="1" dirty="0" smtClean="0">
+              <a:rPr lang="ko-KR" altLang="en-US" sz="1400" b="1" dirty="0">
                 <a:solidFill>
                   <a:schemeClr val="dk1"/>
                 </a:solidFill>
@@ -39891,13 +39378,6 @@
   <p:clrMapOvr>
     <a:masterClrMapping/>
   </p:clrMapOvr>
-  <p:timing>
-    <p:tnLst>
-      <p:par>
-        <p:cTn id="1" dur="indefinite" restart="never" nodeType="tmRoot"/>
-      </p:par>
-    </p:tnLst>
-  </p:timing>
 </p:sld>
 </file>
 
@@ -39934,10 +39414,9 @@
           <a:lstStyle/>
           <a:p>
             <a:r>
-              <a:rPr lang="ko-KR" altLang="en-US" dirty="0" smtClean="0"/>
+              <a:rPr lang="ko-KR" altLang="en-US" dirty="0"/>
               <a:t>사업 목표</a:t>
             </a:r>
-            <a:endParaRPr lang="ko-KR" altLang="en-US" dirty="0"/>
           </a:p>
         </p:txBody>
       </p:sp>
@@ -40098,15 +39577,6 @@
               </a:rPr>
               <a:t>종합 보안 체계 구축</a:t>
             </a:r>
-            <a:r>
-              <a:rPr lang="ko-KR" altLang="en-US" sz="1500" b="1" dirty="0">
-                <a:solidFill>
-                  <a:schemeClr val="tx1"/>
-                </a:solidFill>
-                <a:ea typeface="Noto Sans KR Black"/>
-              </a:rPr>
-              <a:t/>
-            </a:r>
             <a:br>
               <a:rPr lang="ko-KR" altLang="en-US" sz="1500" b="1" dirty="0">
                 <a:solidFill>
@@ -40123,12 +39593,6 @@
                 <a:ea typeface="Noto Sans KR Black"/>
               </a:rPr>
               <a:t>인프라(WEB, WAS, DB) 최적화, 보안장비 도입,</a:t>
-            </a:r>
-            <a:r>
-              <a:rPr lang="ko-KR" altLang="en-US" sz="1200" b="1" dirty="0">
-                <a:ea typeface="Noto Sans KR Black"/>
-              </a:rPr>
-              <a:t/>
             </a:r>
             <a:br>
               <a:rPr lang="ko-KR" altLang="en-US" sz="1200" b="1" dirty="0">
@@ -40255,12 +39719,6 @@
               </a:rPr>
               <a:t>보안 위협 선제적 대응</a:t>
             </a:r>
-            <a:r>
-              <a:rPr lang="ko-KR" altLang="en-US" sz="1500" b="1" dirty="0">
-                <a:ea typeface="Noto Sans KR Black"/>
-              </a:rPr>
-              <a:t/>
-            </a:r>
             <a:br>
               <a:rPr lang="ko-KR" altLang="en-US" sz="1500" b="1" dirty="0">
                 <a:ea typeface="Noto Sans KR Black"/>
@@ -40273,28 +39731,10 @@
                 </a:solidFill>
                 <a:ea typeface="Noto Sans KR Black"/>
               </a:rPr>
-              <a:t>취약점 진단 및 모의해킹을 통해 </a:t>
-            </a:r>
-            <a:r>
-              <a:rPr lang="ko-KR" altLang="en-US" sz="1200" b="1" dirty="0" smtClean="0">
-                <a:solidFill>
-                  <a:schemeClr val="tx1"/>
-                </a:solidFill>
-                <a:ea typeface="Noto Sans KR Black"/>
-              </a:rPr>
-              <a:t>잠재적</a:t>
-            </a:r>
-            <a:r>
-              <a:rPr lang="en-US" altLang="ko-KR" sz="1200" b="1" dirty="0" smtClean="0">
-                <a:solidFill>
-                  <a:schemeClr val="tx1"/>
-                </a:solidFill>
-                <a:ea typeface="Noto Sans KR Black"/>
-              </a:rPr>
-              <a:t/>
+              <a:t>취약점 진단 및 모의해킹을 통해 잠재적</a:t>
             </a:r>
             <a:br>
-              <a:rPr lang="en-US" altLang="ko-KR" sz="1200" b="1" dirty="0" smtClean="0">
+              <a:rPr lang="en-US" altLang="ko-KR" sz="1200" b="1" dirty="0">
                 <a:solidFill>
                   <a:schemeClr val="tx1"/>
                 </a:solidFill>
@@ -40302,22 +39742,13 @@
               </a:rPr>
             </a:br>
             <a:r>
-              <a:rPr lang="ko-KR" altLang="en-US" sz="1200" b="1" dirty="0" smtClean="0">
-                <a:solidFill>
-                  <a:schemeClr val="tx1"/>
-                </a:solidFill>
-                <a:ea typeface="Noto Sans KR Black"/>
-              </a:rPr>
-              <a:t>보안 위협을 사전에 </a:t>
-            </a:r>
-            <a:r>
               <a:rPr lang="ko-KR" altLang="en-US" sz="1200" b="1" dirty="0">
                 <a:solidFill>
                   <a:schemeClr val="tx1"/>
                 </a:solidFill>
                 <a:ea typeface="Noto Sans KR Black"/>
               </a:rPr>
-              <a:t>식별하고 제거</a:t>
+              <a:t>보안 위협을 사전에 식별하고 제거</a:t>
             </a:r>
           </a:p>
         </p:txBody>
@@ -40381,15 +39812,6 @@
                 <a:ea typeface="Noto Sans KR Black"/>
               </a:rPr>
               <a:t>신속한 탐지 및 대응 체계 마련</a:t>
-            </a:r>
-            <a:r>
-              <a:rPr lang="ko-KR" altLang="en-US" sz="1500" b="1" dirty="0">
-                <a:solidFill>
-                  <a:schemeClr val="tx1"/>
-                </a:solidFill>
-                <a:ea typeface="Noto Sans KR Black"/>
-              </a:rPr>
-              <a:t/>
             </a:r>
             <a:br>
               <a:rPr lang="ko-KR" altLang="en-US" sz="1500" b="1" dirty="0">
@@ -40505,15 +39927,6 @@
                 <a:ea typeface="Noto Sans KR Black"/>
               </a:rPr>
               <a:t> 기준 수립</a:t>
-            </a:r>
-            <a:r>
-              <a:rPr lang="ko-KR" altLang="en-US" sz="1500" b="1" dirty="0">
-                <a:solidFill>
-                  <a:schemeClr val="tx1"/>
-                </a:solidFill>
-                <a:ea typeface="Noto Sans KR Black"/>
-              </a:rPr>
-              <a:t/>
             </a:r>
             <a:br>
               <a:rPr lang="ko-KR" altLang="en-US" sz="1500" b="1" dirty="0">
@@ -40803,13 +40216,6 @@
   <p:clrMapOvr>
     <a:masterClrMapping/>
   </p:clrMapOvr>
-  <p:timing>
-    <p:tnLst>
-      <p:par>
-        <p:cTn id="1" dur="indefinite" restart="never" nodeType="tmRoot"/>
-      </p:par>
-    </p:tnLst>
-  </p:timing>
 </p:sld>
 </file>
 
